--- a/docs/pptx/carbo/ritu-carbo-linsubhr-sens-aki2.pptx
+++ b/docs/pptx/carbo/ritu-carbo-linsubhr-sens-aki2.pptx
@@ -2443,7 +2443,7 @@
           </p:nvSpPr>
           <p:spPr>
             <a:xfrm>
-              <a:off x="868706" y="2073503"/>
+              <a:off x="869934" y="2073503"/>
               <a:ext cx="0" cy="3649639"/>
             </a:xfrm>
             <a:custGeom>
@@ -2486,7 +2486,7 @@
           </p:nvSpPr>
           <p:spPr>
             <a:xfrm>
-              <a:off x="2695888" y="2073503"/>
+              <a:off x="2693907" y="2073503"/>
               <a:ext cx="0" cy="3649639"/>
             </a:xfrm>
             <a:custGeom>
@@ -2529,7 +2529,7 @@
           </p:nvSpPr>
           <p:spPr>
             <a:xfrm>
-              <a:off x="4523069" y="2073503"/>
+              <a:off x="4517879" y="2073503"/>
               <a:ext cx="0" cy="3649639"/>
             </a:xfrm>
             <a:custGeom>
@@ -2572,7 +2572,7 @@
           </p:nvSpPr>
           <p:spPr>
             <a:xfrm>
-              <a:off x="6350251" y="2073503"/>
+              <a:off x="6341852" y="2073503"/>
               <a:ext cx="0" cy="3649639"/>
             </a:xfrm>
             <a:custGeom>
@@ -2615,7 +2615,7 @@
           </p:nvSpPr>
           <p:spPr>
             <a:xfrm>
-              <a:off x="8177433" y="2073503"/>
+              <a:off x="8165824" y="2073503"/>
               <a:ext cx="0" cy="3649639"/>
             </a:xfrm>
             <a:custGeom>
@@ -2873,7 +2873,7 @@
           </p:nvSpPr>
           <p:spPr>
             <a:xfrm>
-              <a:off x="1782297" y="2073503"/>
+              <a:off x="1781921" y="2073503"/>
               <a:ext cx="0" cy="3649639"/>
             </a:xfrm>
             <a:custGeom>
@@ -2916,7 +2916,7 @@
           </p:nvSpPr>
           <p:spPr>
             <a:xfrm>
-              <a:off x="3609478" y="2073503"/>
+              <a:off x="3605893" y="2073503"/>
               <a:ext cx="0" cy="3649639"/>
             </a:xfrm>
             <a:custGeom>
@@ -2959,7 +2959,7 @@
           </p:nvSpPr>
           <p:spPr>
             <a:xfrm>
-              <a:off x="5436660" y="2073503"/>
+              <a:off x="5429866" y="2073503"/>
               <a:ext cx="0" cy="3649639"/>
             </a:xfrm>
             <a:custGeom>
@@ -3002,7 +3002,7 @@
           </p:nvSpPr>
           <p:spPr>
             <a:xfrm>
-              <a:off x="7263842" y="2073503"/>
+              <a:off x="7253838" y="2073503"/>
               <a:ext cx="0" cy="3649639"/>
             </a:xfrm>
             <a:custGeom>
@@ -3046,515 +3046,512 @@
           <p:spPr>
             <a:xfrm>
               <a:off x="1172049" y="2073503"/>
-              <a:ext cx="7090630" cy="3476332"/>
+              <a:ext cx="7090630" cy="3476241"/>
             </a:xfrm>
             <a:custGeom>
               <a:avLst/>
               <a:pathLst>
-                <a:path w="7090630" h="3476332">
+                <a:path w="7090630" h="3476241">
                   <a:moveTo>
-                    <a:pt x="2356776" y="0"/>
+                    <a:pt x="2374579" y="0"/>
                   </a:moveTo>
                   <a:lnTo>
-                    <a:pt x="2363543" y="31813"/>
-                  </a:lnTo>
-                  <a:lnTo>
-                    <a:pt x="2435165" y="338620"/>
-                  </a:lnTo>
-                  <a:lnTo>
-                    <a:pt x="2506788" y="618157"/>
-                  </a:lnTo>
-                  <a:lnTo>
-                    <a:pt x="2578410" y="872850"/>
-                  </a:lnTo>
-                  <a:lnTo>
-                    <a:pt x="2650033" y="1104905"/>
-                  </a:lnTo>
-                  <a:lnTo>
-                    <a:pt x="2721655" y="1316336"/>
-                  </a:lnTo>
-                  <a:lnTo>
-                    <a:pt x="2793278" y="1508974"/>
-                  </a:lnTo>
-                  <a:lnTo>
-                    <a:pt x="2864901" y="1684491"/>
-                  </a:lnTo>
-                  <a:lnTo>
-                    <a:pt x="2936523" y="1844408"/>
-                  </a:lnTo>
-                  <a:lnTo>
-                    <a:pt x="3008146" y="1990112"/>
-                  </a:lnTo>
-                  <a:lnTo>
-                    <a:pt x="3079768" y="2122866"/>
-                  </a:lnTo>
-                  <a:lnTo>
-                    <a:pt x="3151391" y="2243820"/>
-                  </a:lnTo>
-                  <a:lnTo>
-                    <a:pt x="3223013" y="2354024"/>
-                  </a:lnTo>
-                  <a:lnTo>
-                    <a:pt x="3294636" y="2454434"/>
-                  </a:lnTo>
-                  <a:lnTo>
-                    <a:pt x="3366258" y="2545919"/>
-                  </a:lnTo>
-                  <a:lnTo>
-                    <a:pt x="3437881" y="2629272"/>
-                  </a:lnTo>
-                  <a:lnTo>
-                    <a:pt x="3509503" y="2644475"/>
-                  </a:lnTo>
-                  <a:lnTo>
-                    <a:pt x="3581126" y="2629858"/>
-                  </a:lnTo>
-                  <a:lnTo>
-                    <a:pt x="3652748" y="2614987"/>
-                  </a:lnTo>
-                  <a:lnTo>
-                    <a:pt x="3724371" y="2599857"/>
-                  </a:lnTo>
-                  <a:lnTo>
-                    <a:pt x="3795993" y="2584464"/>
-                  </a:lnTo>
-                  <a:lnTo>
-                    <a:pt x="3867616" y="2568802"/>
-                  </a:lnTo>
-                  <a:lnTo>
-                    <a:pt x="3939238" y="2552868"/>
-                  </a:lnTo>
-                  <a:lnTo>
-                    <a:pt x="4010861" y="2536656"/>
-                  </a:lnTo>
-                  <a:lnTo>
-                    <a:pt x="4082483" y="2520162"/>
-                  </a:lnTo>
-                  <a:lnTo>
-                    <a:pt x="4154106" y="2503381"/>
-                  </a:lnTo>
-                  <a:lnTo>
-                    <a:pt x="4225729" y="2486307"/>
-                  </a:lnTo>
-                  <a:lnTo>
-                    <a:pt x="4297351" y="2468936"/>
-                  </a:lnTo>
-                  <a:lnTo>
-                    <a:pt x="4368974" y="2451263"/>
-                  </a:lnTo>
-                  <a:lnTo>
-                    <a:pt x="4440596" y="2433281"/>
-                  </a:lnTo>
-                  <a:lnTo>
-                    <a:pt x="4512219" y="2414987"/>
-                  </a:lnTo>
-                  <a:lnTo>
-                    <a:pt x="4583841" y="2396374"/>
-                  </a:lnTo>
-                  <a:lnTo>
-                    <a:pt x="4655464" y="2377437"/>
-                  </a:lnTo>
-                  <a:lnTo>
-                    <a:pt x="4727086" y="2358170"/>
-                  </a:lnTo>
-                  <a:lnTo>
-                    <a:pt x="4798709" y="2338567"/>
-                  </a:lnTo>
-                  <a:lnTo>
-                    <a:pt x="4870331" y="2318623"/>
-                  </a:lnTo>
-                  <a:lnTo>
-                    <a:pt x="4941954" y="2298332"/>
-                  </a:lnTo>
-                  <a:lnTo>
-                    <a:pt x="5013576" y="2277687"/>
-                  </a:lnTo>
-                  <a:lnTo>
-                    <a:pt x="5085199" y="2256683"/>
-                  </a:lnTo>
-                  <a:lnTo>
-                    <a:pt x="5156821" y="2235313"/>
-                  </a:lnTo>
-                  <a:lnTo>
-                    <a:pt x="5228444" y="2213571"/>
-                  </a:lnTo>
-                  <a:lnTo>
-                    <a:pt x="5300066" y="2191450"/>
-                  </a:lnTo>
-                  <a:lnTo>
-                    <a:pt x="5371689" y="2168944"/>
-                  </a:lnTo>
-                  <a:lnTo>
-                    <a:pt x="5443311" y="2146046"/>
-                  </a:lnTo>
-                  <a:lnTo>
-                    <a:pt x="5514934" y="2122749"/>
-                  </a:lnTo>
-                  <a:lnTo>
-                    <a:pt x="5586557" y="2099046"/>
-                  </a:lnTo>
-                  <a:lnTo>
-                    <a:pt x="5658179" y="2074931"/>
-                  </a:lnTo>
-                  <a:lnTo>
-                    <a:pt x="5729802" y="2050396"/>
-                  </a:lnTo>
-                  <a:lnTo>
-                    <a:pt x="5801424" y="2025433"/>
-                  </a:lnTo>
-                  <a:lnTo>
-                    <a:pt x="5873047" y="2000035"/>
-                  </a:lnTo>
-                  <a:lnTo>
-                    <a:pt x="5944669" y="1974196"/>
-                  </a:lnTo>
-                  <a:lnTo>
-                    <a:pt x="6016292" y="1947906"/>
-                  </a:lnTo>
-                  <a:lnTo>
-                    <a:pt x="6087914" y="1921159"/>
-                  </a:lnTo>
-                  <a:lnTo>
-                    <a:pt x="6159537" y="1893945"/>
-                  </a:lnTo>
-                  <a:lnTo>
-                    <a:pt x="6231159" y="1866258"/>
-                  </a:lnTo>
-                  <a:lnTo>
-                    <a:pt x="6302782" y="1838088"/>
-                  </a:lnTo>
-                  <a:lnTo>
-                    <a:pt x="6374404" y="1809428"/>
-                  </a:lnTo>
-                  <a:lnTo>
-                    <a:pt x="6446027" y="1780269"/>
-                  </a:lnTo>
-                  <a:lnTo>
-                    <a:pt x="6517649" y="1750602"/>
-                  </a:lnTo>
-                  <a:lnTo>
-                    <a:pt x="6589272" y="1720418"/>
-                  </a:lnTo>
-                  <a:lnTo>
-                    <a:pt x="6660894" y="1689709"/>
-                  </a:lnTo>
-                  <a:lnTo>
-                    <a:pt x="6732517" y="1658465"/>
-                  </a:lnTo>
-                  <a:lnTo>
-                    <a:pt x="6804139" y="1626676"/>
-                  </a:lnTo>
-                  <a:lnTo>
-                    <a:pt x="6875762" y="1594334"/>
-                  </a:lnTo>
-                  <a:lnTo>
-                    <a:pt x="6947385" y="1561429"/>
-                  </a:lnTo>
-                  <a:lnTo>
-                    <a:pt x="7019007" y="1527951"/>
-                  </a:lnTo>
-                  <a:lnTo>
-                    <a:pt x="7090630" y="1493889"/>
-                  </a:lnTo>
-                  <a:lnTo>
-                    <a:pt x="7090630" y="3476332"/>
-                  </a:lnTo>
-                  <a:lnTo>
-                    <a:pt x="7019007" y="3475609"/>
-                  </a:lnTo>
-                  <a:lnTo>
-                    <a:pt x="6947385" y="3474815"/>
-                  </a:lnTo>
-                  <a:lnTo>
-                    <a:pt x="6875762" y="3473944"/>
-                  </a:lnTo>
-                  <a:lnTo>
-                    <a:pt x="6804139" y="3472988"/>
-                  </a:lnTo>
-                  <a:lnTo>
-                    <a:pt x="6732517" y="3471938"/>
-                  </a:lnTo>
-                  <a:lnTo>
-                    <a:pt x="6660894" y="3470786"/>
-                  </a:lnTo>
-                  <a:lnTo>
-                    <a:pt x="6589272" y="3469522"/>
-                  </a:lnTo>
-                  <a:lnTo>
-                    <a:pt x="6517649" y="3468134"/>
-                  </a:lnTo>
-                  <a:lnTo>
-                    <a:pt x="6446027" y="3466612"/>
-                  </a:lnTo>
-                  <a:lnTo>
-                    <a:pt x="6374404" y="3464940"/>
-                  </a:lnTo>
-                  <a:lnTo>
-                    <a:pt x="6302782" y="3463105"/>
-                  </a:lnTo>
-                  <a:lnTo>
-                    <a:pt x="6231159" y="3461092"/>
-                  </a:lnTo>
-                  <a:lnTo>
-                    <a:pt x="6159537" y="3458882"/>
-                  </a:lnTo>
-                  <a:lnTo>
-                    <a:pt x="6087914" y="3456456"/>
-                  </a:lnTo>
-                  <a:lnTo>
-                    <a:pt x="6016292" y="3453794"/>
-                  </a:lnTo>
-                  <a:lnTo>
-                    <a:pt x="5944669" y="3450873"/>
-                  </a:lnTo>
-                  <a:lnTo>
-                    <a:pt x="5873047" y="3447666"/>
-                  </a:lnTo>
-                  <a:lnTo>
-                    <a:pt x="5801424" y="3444146"/>
-                  </a:lnTo>
-                  <a:lnTo>
-                    <a:pt x="5729802" y="3440283"/>
-                  </a:lnTo>
-                  <a:lnTo>
-                    <a:pt x="5658179" y="3436043"/>
-                  </a:lnTo>
-                  <a:lnTo>
-                    <a:pt x="5586557" y="3431390"/>
-                  </a:lnTo>
-                  <a:lnTo>
-                    <a:pt x="5514934" y="3426282"/>
-                  </a:lnTo>
-                  <a:lnTo>
-                    <a:pt x="5443311" y="3420677"/>
-                  </a:lnTo>
-                  <a:lnTo>
-                    <a:pt x="5371689" y="3414524"/>
-                  </a:lnTo>
-                  <a:lnTo>
-                    <a:pt x="5300066" y="3407772"/>
-                  </a:lnTo>
-                  <a:lnTo>
-                    <a:pt x="5228444" y="3400360"/>
-                  </a:lnTo>
-                  <a:lnTo>
-                    <a:pt x="5156821" y="3392226"/>
-                  </a:lnTo>
-                  <a:lnTo>
-                    <a:pt x="5085199" y="3383298"/>
-                  </a:lnTo>
-                  <a:lnTo>
-                    <a:pt x="5013576" y="3373500"/>
-                  </a:lnTo>
-                  <a:lnTo>
-                    <a:pt x="4941954" y="3362745"/>
-                  </a:lnTo>
-                  <a:lnTo>
-                    <a:pt x="4870331" y="3350941"/>
-                  </a:lnTo>
-                  <a:lnTo>
-                    <a:pt x="4798709" y="3337986"/>
-                  </a:lnTo>
-                  <a:lnTo>
-                    <a:pt x="4727086" y="3323768"/>
-                  </a:lnTo>
-                  <a:lnTo>
-                    <a:pt x="4655464" y="3308162"/>
-                  </a:lnTo>
-                  <a:lnTo>
-                    <a:pt x="4583841" y="3291033"/>
-                  </a:lnTo>
-                  <a:lnTo>
-                    <a:pt x="4512219" y="3272234"/>
-                  </a:lnTo>
-                  <a:lnTo>
-                    <a:pt x="4440596" y="3251601"/>
-                  </a:lnTo>
-                  <a:lnTo>
-                    <a:pt x="4368974" y="3228956"/>
-                  </a:lnTo>
-                  <a:lnTo>
-                    <a:pt x="4297351" y="3204101"/>
-                  </a:lnTo>
-                  <a:lnTo>
-                    <a:pt x="4225729" y="3176821"/>
-                  </a:lnTo>
-                  <a:lnTo>
-                    <a:pt x="4154106" y="3146881"/>
-                  </a:lnTo>
-                  <a:lnTo>
-                    <a:pt x="4082483" y="3114020"/>
-                  </a:lnTo>
-                  <a:lnTo>
-                    <a:pt x="4010861" y="3077953"/>
-                  </a:lnTo>
-                  <a:lnTo>
-                    <a:pt x="3939238" y="3038368"/>
-                  </a:lnTo>
-                  <a:lnTo>
-                    <a:pt x="3867616" y="2994921"/>
-                  </a:lnTo>
-                  <a:lnTo>
-                    <a:pt x="3795993" y="2947237"/>
-                  </a:lnTo>
-                  <a:lnTo>
-                    <a:pt x="3724371" y="2894900"/>
-                  </a:lnTo>
-                  <a:lnTo>
-                    <a:pt x="3652748" y="2837458"/>
-                  </a:lnTo>
-                  <a:lnTo>
-                    <a:pt x="3581126" y="2774413"/>
-                  </a:lnTo>
-                  <a:lnTo>
-                    <a:pt x="3509503" y="2705218"/>
-                  </a:lnTo>
-                  <a:lnTo>
-                    <a:pt x="3437881" y="2658841"/>
-                  </a:lnTo>
-                  <a:lnTo>
-                    <a:pt x="3366258" y="2672961"/>
-                  </a:lnTo>
-                  <a:lnTo>
-                    <a:pt x="3294636" y="2686840"/>
-                  </a:lnTo>
-                  <a:lnTo>
-                    <a:pt x="3223013" y="2700481"/>
-                  </a:lnTo>
-                  <a:lnTo>
-                    <a:pt x="3151391" y="2713888"/>
-                  </a:lnTo>
-                  <a:lnTo>
-                    <a:pt x="3079768" y="2727066"/>
-                  </a:lnTo>
-                  <a:lnTo>
-                    <a:pt x="3008146" y="2740019"/>
-                  </a:lnTo>
-                  <a:lnTo>
-                    <a:pt x="2936523" y="2752750"/>
-                  </a:lnTo>
-                  <a:lnTo>
-                    <a:pt x="2864901" y="2765262"/>
-                  </a:lnTo>
-                  <a:lnTo>
-                    <a:pt x="2793278" y="2777561"/>
-                  </a:lnTo>
-                  <a:lnTo>
-                    <a:pt x="2721655" y="2789649"/>
-                  </a:lnTo>
-                  <a:lnTo>
-                    <a:pt x="2650033" y="2801530"/>
-                  </a:lnTo>
-                  <a:lnTo>
-                    <a:pt x="2578410" y="2813208"/>
-                  </a:lnTo>
-                  <a:lnTo>
-                    <a:pt x="2506788" y="2824686"/>
-                  </a:lnTo>
-                  <a:lnTo>
-                    <a:pt x="2435165" y="2835968"/>
-                  </a:lnTo>
-                  <a:lnTo>
-                    <a:pt x="2363543" y="2847056"/>
-                  </a:lnTo>
-                  <a:lnTo>
-                    <a:pt x="2291920" y="2857954"/>
-                  </a:lnTo>
-                  <a:lnTo>
-                    <a:pt x="2220298" y="2868666"/>
-                  </a:lnTo>
-                  <a:lnTo>
-                    <a:pt x="2148675" y="2879195"/>
-                  </a:lnTo>
-                  <a:lnTo>
-                    <a:pt x="2077053" y="2889543"/>
-                  </a:lnTo>
-                  <a:lnTo>
-                    <a:pt x="2005430" y="2899715"/>
-                  </a:lnTo>
-                  <a:lnTo>
-                    <a:pt x="1933808" y="2909712"/>
-                  </a:lnTo>
-                  <a:lnTo>
-                    <a:pt x="1862185" y="2919538"/>
-                  </a:lnTo>
-                  <a:lnTo>
-                    <a:pt x="1790563" y="2929196"/>
-                  </a:lnTo>
-                  <a:lnTo>
-                    <a:pt x="1718940" y="2938688"/>
-                  </a:lnTo>
-                  <a:lnTo>
-                    <a:pt x="1647318" y="2948018"/>
-                  </a:lnTo>
-                  <a:lnTo>
-                    <a:pt x="1575695" y="2957189"/>
-                  </a:lnTo>
-                  <a:lnTo>
-                    <a:pt x="1504073" y="2966202"/>
-                  </a:lnTo>
-                  <a:lnTo>
-                    <a:pt x="1432450" y="2975061"/>
-                  </a:lnTo>
-                  <a:lnTo>
-                    <a:pt x="1360827" y="2983768"/>
-                  </a:lnTo>
-                  <a:lnTo>
-                    <a:pt x="1289205" y="2992327"/>
-                  </a:lnTo>
-                  <a:lnTo>
-                    <a:pt x="1217582" y="3000739"/>
-                  </a:lnTo>
-                  <a:lnTo>
-                    <a:pt x="1145960" y="3009006"/>
-                  </a:lnTo>
-                  <a:lnTo>
-                    <a:pt x="1074337" y="3017133"/>
-                  </a:lnTo>
-                  <a:lnTo>
-                    <a:pt x="1002715" y="3025120"/>
-                  </a:lnTo>
-                  <a:lnTo>
-                    <a:pt x="931092" y="3032971"/>
-                  </a:lnTo>
-                  <a:lnTo>
-                    <a:pt x="859470" y="3040687"/>
-                  </a:lnTo>
-                  <a:lnTo>
-                    <a:pt x="787847" y="3048271"/>
-                  </a:lnTo>
-                  <a:lnTo>
-                    <a:pt x="716225" y="3055725"/>
-                  </a:lnTo>
-                  <a:lnTo>
-                    <a:pt x="644602" y="3063052"/>
-                  </a:lnTo>
-                  <a:lnTo>
-                    <a:pt x="572980" y="3070253"/>
-                  </a:lnTo>
-                  <a:lnTo>
-                    <a:pt x="501357" y="3077331"/>
-                  </a:lnTo>
-                  <a:lnTo>
-                    <a:pt x="429735" y="3084288"/>
-                  </a:lnTo>
-                  <a:lnTo>
-                    <a:pt x="358112" y="3091125"/>
-                  </a:lnTo>
-                  <a:lnTo>
-                    <a:pt x="286490" y="3097846"/>
-                  </a:lnTo>
-                  <a:lnTo>
-                    <a:pt x="214867" y="3104452"/>
-                  </a:lnTo>
-                  <a:lnTo>
-                    <a:pt x="143245" y="3110944"/>
-                  </a:lnTo>
-                  <a:lnTo>
-                    <a:pt x="71622" y="3117326"/>
-                  </a:lnTo>
-                  <a:lnTo>
-                    <a:pt x="0" y="3123598"/>
+                    <a:pt x="2435165" y="266013"/>
+                  </a:lnTo>
+                  <a:lnTo>
+                    <a:pt x="2506788" y="552483"/>
+                  </a:lnTo>
+                  <a:lnTo>
+                    <a:pt x="2578410" y="813450"/>
+                  </a:lnTo>
+                  <a:lnTo>
+                    <a:pt x="2650033" y="1051182"/>
+                  </a:lnTo>
+                  <a:lnTo>
+                    <a:pt x="2721655" y="1267750"/>
+                  </a:lnTo>
+                  <a:lnTo>
+                    <a:pt x="2793278" y="1465038"/>
+                  </a:lnTo>
+                  <a:lnTo>
+                    <a:pt x="2864901" y="1644760"/>
+                  </a:lnTo>
+                  <a:lnTo>
+                    <a:pt x="2936523" y="1808483"/>
+                  </a:lnTo>
+                  <a:lnTo>
+                    <a:pt x="3008146" y="1957629"/>
+                  </a:lnTo>
+                  <a:lnTo>
+                    <a:pt x="3079768" y="2093498"/>
+                  </a:lnTo>
+                  <a:lnTo>
+                    <a:pt x="3151391" y="2217269"/>
+                  </a:lnTo>
+                  <a:lnTo>
+                    <a:pt x="3223013" y="2330022"/>
+                  </a:lnTo>
+                  <a:lnTo>
+                    <a:pt x="3294636" y="2432737"/>
+                  </a:lnTo>
+                  <a:lnTo>
+                    <a:pt x="3366258" y="2526307"/>
+                  </a:lnTo>
+                  <a:lnTo>
+                    <a:pt x="3437881" y="2611546"/>
+                  </a:lnTo>
+                  <a:lnTo>
+                    <a:pt x="3509503" y="2647640"/>
+                  </a:lnTo>
+                  <a:lnTo>
+                    <a:pt x="3581126" y="2633053"/>
+                  </a:lnTo>
+                  <a:lnTo>
+                    <a:pt x="3652748" y="2618211"/>
+                  </a:lnTo>
+                  <a:lnTo>
+                    <a:pt x="3724371" y="2603111"/>
+                  </a:lnTo>
+                  <a:lnTo>
+                    <a:pt x="3795993" y="2587747"/>
+                  </a:lnTo>
+                  <a:lnTo>
+                    <a:pt x="3867616" y="2572115"/>
+                  </a:lnTo>
+                  <a:lnTo>
+                    <a:pt x="3939238" y="2556211"/>
+                  </a:lnTo>
+                  <a:lnTo>
+                    <a:pt x="4010861" y="2540029"/>
+                  </a:lnTo>
+                  <a:lnTo>
+                    <a:pt x="4082483" y="2523564"/>
+                  </a:lnTo>
+                  <a:lnTo>
+                    <a:pt x="4154106" y="2506812"/>
+                  </a:lnTo>
+                  <a:lnTo>
+                    <a:pt x="4225729" y="2489769"/>
+                  </a:lnTo>
+                  <a:lnTo>
+                    <a:pt x="4297351" y="2472427"/>
+                  </a:lnTo>
+                  <a:lnTo>
+                    <a:pt x="4368974" y="2454783"/>
+                  </a:lnTo>
+                  <a:lnTo>
+                    <a:pt x="4440596" y="2436832"/>
+                  </a:lnTo>
+                  <a:lnTo>
+                    <a:pt x="4512219" y="2418567"/>
+                  </a:lnTo>
+                  <a:lnTo>
+                    <a:pt x="4583841" y="2399984"/>
+                  </a:lnTo>
+                  <a:lnTo>
+                    <a:pt x="4655464" y="2381076"/>
+                  </a:lnTo>
+                  <a:lnTo>
+                    <a:pt x="4727086" y="2361838"/>
+                  </a:lnTo>
+                  <a:lnTo>
+                    <a:pt x="4798709" y="2342265"/>
+                  </a:lnTo>
+                  <a:lnTo>
+                    <a:pt x="4870331" y="2322350"/>
+                  </a:lnTo>
+                  <a:lnTo>
+                    <a:pt x="4941954" y="2302088"/>
+                  </a:lnTo>
+                  <a:lnTo>
+                    <a:pt x="5013576" y="2281473"/>
+                  </a:lnTo>
+                  <a:lnTo>
+                    <a:pt x="5085199" y="2260497"/>
+                  </a:lnTo>
+                  <a:lnTo>
+                    <a:pt x="5156821" y="2239156"/>
+                  </a:lnTo>
+                  <a:lnTo>
+                    <a:pt x="5228444" y="2217443"/>
+                  </a:lnTo>
+                  <a:lnTo>
+                    <a:pt x="5300066" y="2195350"/>
+                  </a:lnTo>
+                  <a:lnTo>
+                    <a:pt x="5371689" y="2172873"/>
+                  </a:lnTo>
+                  <a:lnTo>
+                    <a:pt x="5443311" y="2150003"/>
+                  </a:lnTo>
+                  <a:lnTo>
+                    <a:pt x="5514934" y="2126734"/>
+                  </a:lnTo>
+                  <a:lnTo>
+                    <a:pt x="5586557" y="2103059"/>
+                  </a:lnTo>
+                  <a:lnTo>
+                    <a:pt x="5658179" y="2078971"/>
+                  </a:lnTo>
+                  <a:lnTo>
+                    <a:pt x="5729802" y="2054463"/>
+                  </a:lnTo>
+                  <a:lnTo>
+                    <a:pt x="5801424" y="2029527"/>
+                  </a:lnTo>
+                  <a:lnTo>
+                    <a:pt x="5873047" y="2004156"/>
+                  </a:lnTo>
+                  <a:lnTo>
+                    <a:pt x="5944669" y="1978343"/>
+                  </a:lnTo>
+                  <a:lnTo>
+                    <a:pt x="6016292" y="1952079"/>
+                  </a:lnTo>
+                  <a:lnTo>
+                    <a:pt x="6087914" y="1925357"/>
+                  </a:lnTo>
+                  <a:lnTo>
+                    <a:pt x="6159537" y="1898169"/>
+                  </a:lnTo>
+                  <a:lnTo>
+                    <a:pt x="6231159" y="1870506"/>
+                  </a:lnTo>
+                  <a:lnTo>
+                    <a:pt x="6302782" y="1842361"/>
+                  </a:lnTo>
+                  <a:lnTo>
+                    <a:pt x="6374404" y="1813725"/>
+                  </a:lnTo>
+                  <a:lnTo>
+                    <a:pt x="6446027" y="1784589"/>
+                  </a:lnTo>
+                  <a:lnTo>
+                    <a:pt x="6517649" y="1754945"/>
+                  </a:lnTo>
+                  <a:lnTo>
+                    <a:pt x="6589272" y="1724784"/>
+                  </a:lnTo>
+                  <a:lnTo>
+                    <a:pt x="6660894" y="1694097"/>
+                  </a:lnTo>
+                  <a:lnTo>
+                    <a:pt x="6732517" y="1662874"/>
+                  </a:lnTo>
+                  <a:lnTo>
+                    <a:pt x="6804139" y="1631106"/>
+                  </a:lnTo>
+                  <a:lnTo>
+                    <a:pt x="6875762" y="1598784"/>
+                  </a:lnTo>
+                  <a:lnTo>
+                    <a:pt x="6947385" y="1565899"/>
+                  </a:lnTo>
+                  <a:lnTo>
+                    <a:pt x="7019007" y="1532439"/>
+                  </a:lnTo>
+                  <a:lnTo>
+                    <a:pt x="7090630" y="1498396"/>
+                  </a:lnTo>
+                  <a:lnTo>
+                    <a:pt x="7090630" y="3476241"/>
+                  </a:lnTo>
+                  <a:lnTo>
+                    <a:pt x="7019007" y="3475508"/>
+                  </a:lnTo>
+                  <a:lnTo>
+                    <a:pt x="6947385" y="3474703"/>
+                  </a:lnTo>
+                  <a:lnTo>
+                    <a:pt x="6875762" y="3473819"/>
+                  </a:lnTo>
+                  <a:lnTo>
+                    <a:pt x="6804139" y="3472849"/>
+                  </a:lnTo>
+                  <a:lnTo>
+                    <a:pt x="6732517" y="3471784"/>
+                  </a:lnTo>
+                  <a:lnTo>
+                    <a:pt x="6660894" y="3470614"/>
+                  </a:lnTo>
+                  <a:lnTo>
+                    <a:pt x="6589272" y="3469331"/>
+                  </a:lnTo>
+                  <a:lnTo>
+                    <a:pt x="6517649" y="3467922"/>
+                  </a:lnTo>
+                  <a:lnTo>
+                    <a:pt x="6446027" y="3466376"/>
+                  </a:lnTo>
+                  <a:lnTo>
+                    <a:pt x="6374404" y="3464678"/>
+                  </a:lnTo>
+                  <a:lnTo>
+                    <a:pt x="6302782" y="3462815"/>
+                  </a:lnTo>
+                  <a:lnTo>
+                    <a:pt x="6231159" y="3460769"/>
+                  </a:lnTo>
+                  <a:lnTo>
+                    <a:pt x="6159537" y="3458523"/>
+                  </a:lnTo>
+                  <a:lnTo>
+                    <a:pt x="6087914" y="3456058"/>
+                  </a:lnTo>
+                  <a:lnTo>
+                    <a:pt x="6016292" y="3453353"/>
+                  </a:lnTo>
+                  <a:lnTo>
+                    <a:pt x="5944669" y="3450382"/>
+                  </a:lnTo>
+                  <a:lnTo>
+                    <a:pt x="5873047" y="3447122"/>
+                  </a:lnTo>
+                  <a:lnTo>
+                    <a:pt x="5801424" y="3443542"/>
+                  </a:lnTo>
+                  <a:lnTo>
+                    <a:pt x="5729802" y="3439613"/>
+                  </a:lnTo>
+                  <a:lnTo>
+                    <a:pt x="5658179" y="3435300"/>
+                  </a:lnTo>
+                  <a:lnTo>
+                    <a:pt x="5586557" y="3430565"/>
+                  </a:lnTo>
+                  <a:lnTo>
+                    <a:pt x="5514934" y="3425368"/>
+                  </a:lnTo>
+                  <a:lnTo>
+                    <a:pt x="5443311" y="3419663"/>
+                  </a:lnTo>
+                  <a:lnTo>
+                    <a:pt x="5371689" y="3413400"/>
+                  </a:lnTo>
+                  <a:lnTo>
+                    <a:pt x="5300066" y="3406525"/>
+                  </a:lnTo>
+                  <a:lnTo>
+                    <a:pt x="5228444" y="3398978"/>
+                  </a:lnTo>
+                  <a:lnTo>
+                    <a:pt x="5156821" y="3390694"/>
+                  </a:lnTo>
+                  <a:lnTo>
+                    <a:pt x="5085199" y="3381600"/>
+                  </a:lnTo>
+                  <a:lnTo>
+                    <a:pt x="5013576" y="3371617"/>
+                  </a:lnTo>
+                  <a:lnTo>
+                    <a:pt x="4941954" y="3360659"/>
+                  </a:lnTo>
+                  <a:lnTo>
+                    <a:pt x="4870331" y="3348629"/>
+                  </a:lnTo>
+                  <a:lnTo>
+                    <a:pt x="4798709" y="3335424"/>
+                  </a:lnTo>
+                  <a:lnTo>
+                    <a:pt x="4727086" y="3320929"/>
+                  </a:lnTo>
+                  <a:lnTo>
+                    <a:pt x="4655464" y="3305017"/>
+                  </a:lnTo>
+                  <a:lnTo>
+                    <a:pt x="4583841" y="3287550"/>
+                  </a:lnTo>
+                  <a:lnTo>
+                    <a:pt x="4512219" y="3268376"/>
+                  </a:lnTo>
+                  <a:lnTo>
+                    <a:pt x="4440596" y="3247328"/>
+                  </a:lnTo>
+                  <a:lnTo>
+                    <a:pt x="4368974" y="3224222"/>
+                  </a:lnTo>
+                  <a:lnTo>
+                    <a:pt x="4297351" y="3198859"/>
+                  </a:lnTo>
+                  <a:lnTo>
+                    <a:pt x="4225729" y="3171018"/>
+                  </a:lnTo>
+                  <a:lnTo>
+                    <a:pt x="4154106" y="3140455"/>
+                  </a:lnTo>
+                  <a:lnTo>
+                    <a:pt x="4082483" y="3106905"/>
+                  </a:lnTo>
+                  <a:lnTo>
+                    <a:pt x="4010861" y="3070077"/>
+                  </a:lnTo>
+                  <a:lnTo>
+                    <a:pt x="3939238" y="3029649"/>
+                  </a:lnTo>
+                  <a:lnTo>
+                    <a:pt x="3867616" y="2985270"/>
+                  </a:lnTo>
+                  <a:lnTo>
+                    <a:pt x="3795993" y="2936554"/>
+                  </a:lnTo>
+                  <a:lnTo>
+                    <a:pt x="3724371" y="2883078"/>
+                  </a:lnTo>
+                  <a:lnTo>
+                    <a:pt x="3652748" y="2824375"/>
+                  </a:lnTo>
+                  <a:lnTo>
+                    <a:pt x="3581126" y="2759935"/>
+                  </a:lnTo>
+                  <a:lnTo>
+                    <a:pt x="3509503" y="2689197"/>
+                  </a:lnTo>
+                  <a:lnTo>
+                    <a:pt x="3437881" y="2661977"/>
+                  </a:lnTo>
+                  <a:lnTo>
+                    <a:pt x="3366258" y="2676068"/>
+                  </a:lnTo>
+                  <a:lnTo>
+                    <a:pt x="3294636" y="2689917"/>
+                  </a:lnTo>
+                  <a:lnTo>
+                    <a:pt x="3223013" y="2703529"/>
+                  </a:lnTo>
+                  <a:lnTo>
+                    <a:pt x="3151391" y="2716908"/>
+                  </a:lnTo>
+                  <a:lnTo>
+                    <a:pt x="3079768" y="2730057"/>
+                  </a:lnTo>
+                  <a:lnTo>
+                    <a:pt x="3008146" y="2742980"/>
+                  </a:lnTo>
+                  <a:lnTo>
+                    <a:pt x="2936523" y="2755682"/>
+                  </a:lnTo>
+                  <a:lnTo>
+                    <a:pt x="2864901" y="2768167"/>
+                  </a:lnTo>
+                  <a:lnTo>
+                    <a:pt x="2793278" y="2780437"/>
+                  </a:lnTo>
+                  <a:lnTo>
+                    <a:pt x="2721655" y="2792497"/>
+                  </a:lnTo>
+                  <a:lnTo>
+                    <a:pt x="2650033" y="2804350"/>
+                  </a:lnTo>
+                  <a:lnTo>
+                    <a:pt x="2578410" y="2815999"/>
+                  </a:lnTo>
+                  <a:lnTo>
+                    <a:pt x="2506788" y="2827449"/>
+                  </a:lnTo>
+                  <a:lnTo>
+                    <a:pt x="2435165" y="2838703"/>
+                  </a:lnTo>
+                  <a:lnTo>
+                    <a:pt x="2363543" y="2849764"/>
+                  </a:lnTo>
+                  <a:lnTo>
+                    <a:pt x="2291920" y="2860635"/>
+                  </a:lnTo>
+                  <a:lnTo>
+                    <a:pt x="2220298" y="2871319"/>
+                  </a:lnTo>
+                  <a:lnTo>
+                    <a:pt x="2148675" y="2881821"/>
+                  </a:lnTo>
+                  <a:lnTo>
+                    <a:pt x="2077053" y="2892142"/>
+                  </a:lnTo>
+                  <a:lnTo>
+                    <a:pt x="2005430" y="2902286"/>
+                  </a:lnTo>
+                  <a:lnTo>
+                    <a:pt x="1933808" y="2912257"/>
+                  </a:lnTo>
+                  <a:lnTo>
+                    <a:pt x="1862185" y="2922056"/>
+                  </a:lnTo>
+                  <a:lnTo>
+                    <a:pt x="1790563" y="2931688"/>
+                  </a:lnTo>
+                  <a:lnTo>
+                    <a:pt x="1718940" y="2941154"/>
+                  </a:lnTo>
+                  <a:lnTo>
+                    <a:pt x="1647318" y="2950458"/>
+                  </a:lnTo>
+                  <a:lnTo>
+                    <a:pt x="1575695" y="2959602"/>
+                  </a:lnTo>
+                  <a:lnTo>
+                    <a:pt x="1504073" y="2968590"/>
+                  </a:lnTo>
+                  <a:lnTo>
+                    <a:pt x="1432450" y="2977423"/>
+                  </a:lnTo>
+                  <a:lnTo>
+                    <a:pt x="1360827" y="2986105"/>
+                  </a:lnTo>
+                  <a:lnTo>
+                    <a:pt x="1289205" y="2994638"/>
+                  </a:lnTo>
+                  <a:lnTo>
+                    <a:pt x="1217582" y="3003025"/>
+                  </a:lnTo>
+                  <a:lnTo>
+                    <a:pt x="1145960" y="3011268"/>
+                  </a:lnTo>
+                  <a:lnTo>
+                    <a:pt x="1074337" y="3019370"/>
+                  </a:lnTo>
+                  <a:lnTo>
+                    <a:pt x="1002715" y="3027333"/>
+                  </a:lnTo>
+                  <a:lnTo>
+                    <a:pt x="931092" y="3035159"/>
+                  </a:lnTo>
+                  <a:lnTo>
+                    <a:pt x="859470" y="3042851"/>
+                  </a:lnTo>
+                  <a:lnTo>
+                    <a:pt x="787847" y="3050411"/>
+                  </a:lnTo>
+                  <a:lnTo>
+                    <a:pt x="716225" y="3057841"/>
+                  </a:lnTo>
+                  <a:lnTo>
+                    <a:pt x="644602" y="3065144"/>
+                  </a:lnTo>
+                  <a:lnTo>
+                    <a:pt x="572980" y="3072322"/>
+                  </a:lnTo>
+                  <a:lnTo>
+                    <a:pt x="501357" y="3079377"/>
+                  </a:lnTo>
+                  <a:lnTo>
+                    <a:pt x="429735" y="3086311"/>
+                  </a:lnTo>
+                  <a:lnTo>
+                    <a:pt x="358112" y="3093126"/>
+                  </a:lnTo>
+                  <a:lnTo>
+                    <a:pt x="286490" y="3099824"/>
+                  </a:lnTo>
+                  <a:lnTo>
+                    <a:pt x="214867" y="3106407"/>
+                  </a:lnTo>
+                  <a:lnTo>
+                    <a:pt x="143245" y="3112877"/>
+                  </a:lnTo>
+                  <a:lnTo>
+                    <a:pt x="71622" y="3119237"/>
+                  </a:lnTo>
+                  <a:lnTo>
+                    <a:pt x="0" y="3125487"/>
                   </a:lnTo>
                   <a:lnTo>
                     <a:pt x="0" y="0"/>
@@ -3583,216 +3580,213 @@
           </p:nvSpPr>
           <p:spPr>
             <a:xfrm>
-              <a:off x="3528826" y="2073503"/>
-              <a:ext cx="4733853" cy="2644475"/>
+              <a:off x="3546628" y="2073503"/>
+              <a:ext cx="4716050" cy="2647640"/>
             </a:xfrm>
             <a:custGeom>
               <a:avLst/>
               <a:pathLst>
-                <a:path w="4733853" h="2644475">
+                <a:path w="4716050" h="2647640">
                   <a:moveTo>
                     <a:pt x="0" y="0"/>
                   </a:moveTo>
                   <a:lnTo>
-                    <a:pt x="6766" y="31813"/>
-                  </a:lnTo>
-                  <a:lnTo>
-                    <a:pt x="78389" y="338620"/>
-                  </a:lnTo>
-                  <a:lnTo>
-                    <a:pt x="150011" y="618157"/>
-                  </a:lnTo>
-                  <a:lnTo>
-                    <a:pt x="221634" y="872850"/>
-                  </a:lnTo>
-                  <a:lnTo>
-                    <a:pt x="293256" y="1104905"/>
-                  </a:lnTo>
-                  <a:lnTo>
-                    <a:pt x="364879" y="1316336"/>
-                  </a:lnTo>
-                  <a:lnTo>
-                    <a:pt x="436501" y="1508974"/>
-                  </a:lnTo>
-                  <a:lnTo>
-                    <a:pt x="508124" y="1684491"/>
-                  </a:lnTo>
-                  <a:lnTo>
-                    <a:pt x="579746" y="1844408"/>
-                  </a:lnTo>
-                  <a:lnTo>
-                    <a:pt x="651369" y="1990112"/>
-                  </a:lnTo>
-                  <a:lnTo>
-                    <a:pt x="722991" y="2122866"/>
-                  </a:lnTo>
-                  <a:lnTo>
-                    <a:pt x="794614" y="2243820"/>
-                  </a:lnTo>
-                  <a:lnTo>
-                    <a:pt x="866236" y="2354024"/>
-                  </a:lnTo>
-                  <a:lnTo>
-                    <a:pt x="937859" y="2454434"/>
-                  </a:lnTo>
-                  <a:lnTo>
-                    <a:pt x="1009482" y="2545919"/>
-                  </a:lnTo>
-                  <a:lnTo>
-                    <a:pt x="1081104" y="2629272"/>
-                  </a:lnTo>
-                  <a:lnTo>
-                    <a:pt x="1152727" y="2644475"/>
-                  </a:lnTo>
-                  <a:lnTo>
-                    <a:pt x="1224349" y="2629858"/>
-                  </a:lnTo>
-                  <a:lnTo>
-                    <a:pt x="1295972" y="2614987"/>
-                  </a:lnTo>
-                  <a:lnTo>
-                    <a:pt x="1367594" y="2599857"/>
-                  </a:lnTo>
-                  <a:lnTo>
-                    <a:pt x="1439217" y="2584464"/>
-                  </a:lnTo>
-                  <a:lnTo>
-                    <a:pt x="1510839" y="2568802"/>
-                  </a:lnTo>
-                  <a:lnTo>
-                    <a:pt x="1582462" y="2552868"/>
-                  </a:lnTo>
-                  <a:lnTo>
-                    <a:pt x="1654084" y="2536656"/>
-                  </a:lnTo>
-                  <a:lnTo>
-                    <a:pt x="1725707" y="2520162"/>
-                  </a:lnTo>
-                  <a:lnTo>
-                    <a:pt x="1797329" y="2503381"/>
-                  </a:lnTo>
-                  <a:lnTo>
-                    <a:pt x="1868952" y="2486307"/>
-                  </a:lnTo>
-                  <a:lnTo>
-                    <a:pt x="1940574" y="2468936"/>
-                  </a:lnTo>
-                  <a:lnTo>
-                    <a:pt x="2012197" y="2451263"/>
-                  </a:lnTo>
-                  <a:lnTo>
-                    <a:pt x="2083819" y="2433281"/>
-                  </a:lnTo>
-                  <a:lnTo>
-                    <a:pt x="2155442" y="2414987"/>
-                  </a:lnTo>
-                  <a:lnTo>
-                    <a:pt x="2227064" y="2396374"/>
-                  </a:lnTo>
-                  <a:lnTo>
-                    <a:pt x="2298687" y="2377437"/>
-                  </a:lnTo>
-                  <a:lnTo>
-                    <a:pt x="2370310" y="2358170"/>
-                  </a:lnTo>
-                  <a:lnTo>
-                    <a:pt x="2441932" y="2338567"/>
-                  </a:lnTo>
-                  <a:lnTo>
-                    <a:pt x="2513555" y="2318623"/>
-                  </a:lnTo>
-                  <a:lnTo>
-                    <a:pt x="2585177" y="2298332"/>
-                  </a:lnTo>
-                  <a:lnTo>
-                    <a:pt x="2656800" y="2277687"/>
-                  </a:lnTo>
-                  <a:lnTo>
-                    <a:pt x="2728422" y="2256683"/>
-                  </a:lnTo>
-                  <a:lnTo>
-                    <a:pt x="2800045" y="2235313"/>
-                  </a:lnTo>
-                  <a:lnTo>
-                    <a:pt x="2871667" y="2213571"/>
-                  </a:lnTo>
-                  <a:lnTo>
-                    <a:pt x="2943290" y="2191450"/>
-                  </a:lnTo>
-                  <a:lnTo>
-                    <a:pt x="3014912" y="2168944"/>
-                  </a:lnTo>
-                  <a:lnTo>
-                    <a:pt x="3086535" y="2146046"/>
-                  </a:lnTo>
-                  <a:lnTo>
-                    <a:pt x="3158157" y="2122749"/>
-                  </a:lnTo>
-                  <a:lnTo>
-                    <a:pt x="3229780" y="2099046"/>
-                  </a:lnTo>
-                  <a:lnTo>
-                    <a:pt x="3301402" y="2074931"/>
-                  </a:lnTo>
-                  <a:lnTo>
-                    <a:pt x="3373025" y="2050396"/>
-                  </a:lnTo>
-                  <a:lnTo>
-                    <a:pt x="3444647" y="2025433"/>
-                  </a:lnTo>
-                  <a:lnTo>
-                    <a:pt x="3516270" y="2000035"/>
-                  </a:lnTo>
-                  <a:lnTo>
-                    <a:pt x="3587892" y="1974196"/>
-                  </a:lnTo>
-                  <a:lnTo>
-                    <a:pt x="3659515" y="1947906"/>
-                  </a:lnTo>
-                  <a:lnTo>
-                    <a:pt x="3731138" y="1921159"/>
-                  </a:lnTo>
-                  <a:lnTo>
-                    <a:pt x="3802760" y="1893945"/>
-                  </a:lnTo>
-                  <a:lnTo>
-                    <a:pt x="3874383" y="1866258"/>
-                  </a:lnTo>
-                  <a:lnTo>
-                    <a:pt x="3946005" y="1838088"/>
-                  </a:lnTo>
-                  <a:lnTo>
-                    <a:pt x="4017628" y="1809428"/>
-                  </a:lnTo>
-                  <a:lnTo>
-                    <a:pt x="4089250" y="1780269"/>
-                  </a:lnTo>
-                  <a:lnTo>
-                    <a:pt x="4160873" y="1750602"/>
-                  </a:lnTo>
-                  <a:lnTo>
-                    <a:pt x="4232495" y="1720418"/>
-                  </a:lnTo>
-                  <a:lnTo>
-                    <a:pt x="4304118" y="1689709"/>
-                  </a:lnTo>
-                  <a:lnTo>
-                    <a:pt x="4375740" y="1658465"/>
-                  </a:lnTo>
-                  <a:lnTo>
-                    <a:pt x="4447363" y="1626676"/>
-                  </a:lnTo>
-                  <a:lnTo>
-                    <a:pt x="4518985" y="1594334"/>
-                  </a:lnTo>
-                  <a:lnTo>
-                    <a:pt x="4590608" y="1561429"/>
-                  </a:lnTo>
-                  <a:lnTo>
-                    <a:pt x="4662230" y="1527951"/>
-                  </a:lnTo>
-                  <a:lnTo>
-                    <a:pt x="4733853" y="1493889"/>
+                    <a:pt x="60586" y="266013"/>
+                  </a:lnTo>
+                  <a:lnTo>
+                    <a:pt x="132209" y="552483"/>
+                  </a:lnTo>
+                  <a:lnTo>
+                    <a:pt x="203831" y="813450"/>
+                  </a:lnTo>
+                  <a:lnTo>
+                    <a:pt x="275454" y="1051182"/>
+                  </a:lnTo>
+                  <a:lnTo>
+                    <a:pt x="347076" y="1267750"/>
+                  </a:lnTo>
+                  <a:lnTo>
+                    <a:pt x="418699" y="1465038"/>
+                  </a:lnTo>
+                  <a:lnTo>
+                    <a:pt x="490321" y="1644760"/>
+                  </a:lnTo>
+                  <a:lnTo>
+                    <a:pt x="561944" y="1808483"/>
+                  </a:lnTo>
+                  <a:lnTo>
+                    <a:pt x="633566" y="1957629"/>
+                  </a:lnTo>
+                  <a:lnTo>
+                    <a:pt x="705189" y="2093498"/>
+                  </a:lnTo>
+                  <a:lnTo>
+                    <a:pt x="776811" y="2217269"/>
+                  </a:lnTo>
+                  <a:lnTo>
+                    <a:pt x="848434" y="2330022"/>
+                  </a:lnTo>
+                  <a:lnTo>
+                    <a:pt x="920057" y="2432737"/>
+                  </a:lnTo>
+                  <a:lnTo>
+                    <a:pt x="991679" y="2526307"/>
+                  </a:lnTo>
+                  <a:lnTo>
+                    <a:pt x="1063302" y="2611546"/>
+                  </a:lnTo>
+                  <a:lnTo>
+                    <a:pt x="1134924" y="2647640"/>
+                  </a:lnTo>
+                  <a:lnTo>
+                    <a:pt x="1206547" y="2633053"/>
+                  </a:lnTo>
+                  <a:lnTo>
+                    <a:pt x="1278169" y="2618211"/>
+                  </a:lnTo>
+                  <a:lnTo>
+                    <a:pt x="1349792" y="2603111"/>
+                  </a:lnTo>
+                  <a:lnTo>
+                    <a:pt x="1421414" y="2587747"/>
+                  </a:lnTo>
+                  <a:lnTo>
+                    <a:pt x="1493037" y="2572115"/>
+                  </a:lnTo>
+                  <a:lnTo>
+                    <a:pt x="1564659" y="2556211"/>
+                  </a:lnTo>
+                  <a:lnTo>
+                    <a:pt x="1636282" y="2540029"/>
+                  </a:lnTo>
+                  <a:lnTo>
+                    <a:pt x="1707904" y="2523564"/>
+                  </a:lnTo>
+                  <a:lnTo>
+                    <a:pt x="1779527" y="2506812"/>
+                  </a:lnTo>
+                  <a:lnTo>
+                    <a:pt x="1851149" y="2489769"/>
+                  </a:lnTo>
+                  <a:lnTo>
+                    <a:pt x="1922772" y="2472427"/>
+                  </a:lnTo>
+                  <a:lnTo>
+                    <a:pt x="1994394" y="2454783"/>
+                  </a:lnTo>
+                  <a:lnTo>
+                    <a:pt x="2066017" y="2436832"/>
+                  </a:lnTo>
+                  <a:lnTo>
+                    <a:pt x="2137639" y="2418567"/>
+                  </a:lnTo>
+                  <a:lnTo>
+                    <a:pt x="2209262" y="2399984"/>
+                  </a:lnTo>
+                  <a:lnTo>
+                    <a:pt x="2280885" y="2381076"/>
+                  </a:lnTo>
+                  <a:lnTo>
+                    <a:pt x="2352507" y="2361838"/>
+                  </a:lnTo>
+                  <a:lnTo>
+                    <a:pt x="2424130" y="2342265"/>
+                  </a:lnTo>
+                  <a:lnTo>
+                    <a:pt x="2495752" y="2322350"/>
+                  </a:lnTo>
+                  <a:lnTo>
+                    <a:pt x="2567375" y="2302088"/>
+                  </a:lnTo>
+                  <a:lnTo>
+                    <a:pt x="2638997" y="2281473"/>
+                  </a:lnTo>
+                  <a:lnTo>
+                    <a:pt x="2710620" y="2260497"/>
+                  </a:lnTo>
+                  <a:lnTo>
+                    <a:pt x="2782242" y="2239156"/>
+                  </a:lnTo>
+                  <a:lnTo>
+                    <a:pt x="2853865" y="2217443"/>
+                  </a:lnTo>
+                  <a:lnTo>
+                    <a:pt x="2925487" y="2195350"/>
+                  </a:lnTo>
+                  <a:lnTo>
+                    <a:pt x="2997110" y="2172873"/>
+                  </a:lnTo>
+                  <a:lnTo>
+                    <a:pt x="3068732" y="2150003"/>
+                  </a:lnTo>
+                  <a:lnTo>
+                    <a:pt x="3140355" y="2126734"/>
+                  </a:lnTo>
+                  <a:lnTo>
+                    <a:pt x="3211977" y="2103059"/>
+                  </a:lnTo>
+                  <a:lnTo>
+                    <a:pt x="3283600" y="2078971"/>
+                  </a:lnTo>
+                  <a:lnTo>
+                    <a:pt x="3355222" y="2054463"/>
+                  </a:lnTo>
+                  <a:lnTo>
+                    <a:pt x="3426845" y="2029527"/>
+                  </a:lnTo>
+                  <a:lnTo>
+                    <a:pt x="3498467" y="2004156"/>
+                  </a:lnTo>
+                  <a:lnTo>
+                    <a:pt x="3570090" y="1978343"/>
+                  </a:lnTo>
+                  <a:lnTo>
+                    <a:pt x="3641713" y="1952079"/>
+                  </a:lnTo>
+                  <a:lnTo>
+                    <a:pt x="3713335" y="1925357"/>
+                  </a:lnTo>
+                  <a:lnTo>
+                    <a:pt x="3784958" y="1898169"/>
+                  </a:lnTo>
+                  <a:lnTo>
+                    <a:pt x="3856580" y="1870506"/>
+                  </a:lnTo>
+                  <a:lnTo>
+                    <a:pt x="3928203" y="1842361"/>
+                  </a:lnTo>
+                  <a:lnTo>
+                    <a:pt x="3999825" y="1813725"/>
+                  </a:lnTo>
+                  <a:lnTo>
+                    <a:pt x="4071448" y="1784589"/>
+                  </a:lnTo>
+                  <a:lnTo>
+                    <a:pt x="4143070" y="1754945"/>
+                  </a:lnTo>
+                  <a:lnTo>
+                    <a:pt x="4214693" y="1724784"/>
+                  </a:lnTo>
+                  <a:lnTo>
+                    <a:pt x="4286315" y="1694097"/>
+                  </a:lnTo>
+                  <a:lnTo>
+                    <a:pt x="4357938" y="1662874"/>
+                  </a:lnTo>
+                  <a:lnTo>
+                    <a:pt x="4429560" y="1631106"/>
+                  </a:lnTo>
+                  <a:lnTo>
+                    <a:pt x="4501183" y="1598784"/>
+                  </a:lnTo>
+                  <a:lnTo>
+                    <a:pt x="4572805" y="1565899"/>
+                  </a:lnTo>
+                  <a:lnTo>
+                    <a:pt x="4644428" y="1532439"/>
+                  </a:lnTo>
+                  <a:lnTo>
+                    <a:pt x="4716050" y="1498396"/>
                   </a:lnTo>
                 </a:path>
               </a:pathLst>
@@ -3812,312 +3806,312 @@
           </p:nvSpPr>
           <p:spPr>
             <a:xfrm>
-              <a:off x="1172049" y="4732344"/>
-              <a:ext cx="7090630" cy="817491"/>
+              <a:off x="1172049" y="4735480"/>
+              <a:ext cx="7090630" cy="814264"/>
             </a:xfrm>
             <a:custGeom>
               <a:avLst/>
               <a:pathLst>
-                <a:path w="7090630" h="817491">
+                <a:path w="7090630" h="814264">
                   <a:moveTo>
-                    <a:pt x="7090630" y="817491"/>
+                    <a:pt x="7090630" y="814264"/>
                   </a:moveTo>
                   <a:lnTo>
-                    <a:pt x="7019007" y="816767"/>
-                  </a:lnTo>
-                  <a:lnTo>
-                    <a:pt x="6947385" y="815974"/>
-                  </a:lnTo>
-                  <a:lnTo>
-                    <a:pt x="6875762" y="815102"/>
-                  </a:lnTo>
-                  <a:lnTo>
-                    <a:pt x="6804139" y="814146"/>
-                  </a:lnTo>
-                  <a:lnTo>
-                    <a:pt x="6732517" y="813097"/>
-                  </a:lnTo>
-                  <a:lnTo>
-                    <a:pt x="6660894" y="811945"/>
-                  </a:lnTo>
-                  <a:lnTo>
-                    <a:pt x="6589272" y="810681"/>
-                  </a:lnTo>
-                  <a:lnTo>
-                    <a:pt x="6517649" y="809293"/>
-                  </a:lnTo>
-                  <a:lnTo>
-                    <a:pt x="6446027" y="807770"/>
-                  </a:lnTo>
-                  <a:lnTo>
-                    <a:pt x="6374404" y="806099"/>
-                  </a:lnTo>
-                  <a:lnTo>
-                    <a:pt x="6302782" y="804264"/>
-                  </a:lnTo>
-                  <a:lnTo>
-                    <a:pt x="6231159" y="802250"/>
-                  </a:lnTo>
-                  <a:lnTo>
-                    <a:pt x="6159537" y="800041"/>
-                  </a:lnTo>
-                  <a:lnTo>
-                    <a:pt x="6087914" y="797615"/>
-                  </a:lnTo>
-                  <a:lnTo>
-                    <a:pt x="6016292" y="794953"/>
-                  </a:lnTo>
-                  <a:lnTo>
-                    <a:pt x="5944669" y="792031"/>
-                  </a:lnTo>
-                  <a:lnTo>
-                    <a:pt x="5873047" y="788824"/>
-                  </a:lnTo>
-                  <a:lnTo>
-                    <a:pt x="5801424" y="785305"/>
-                  </a:lnTo>
-                  <a:lnTo>
-                    <a:pt x="5729802" y="781442"/>
-                  </a:lnTo>
-                  <a:lnTo>
-                    <a:pt x="5658179" y="777202"/>
-                  </a:lnTo>
-                  <a:lnTo>
-                    <a:pt x="5586557" y="772548"/>
-                  </a:lnTo>
-                  <a:lnTo>
-                    <a:pt x="5514934" y="767441"/>
-                  </a:lnTo>
-                  <a:lnTo>
-                    <a:pt x="5443311" y="761835"/>
-                  </a:lnTo>
-                  <a:lnTo>
-                    <a:pt x="5371689" y="755683"/>
-                  </a:lnTo>
-                  <a:lnTo>
-                    <a:pt x="5300066" y="748930"/>
-                  </a:lnTo>
-                  <a:lnTo>
-                    <a:pt x="5228444" y="741519"/>
-                  </a:lnTo>
-                  <a:lnTo>
-                    <a:pt x="5156821" y="733385"/>
-                  </a:lnTo>
-                  <a:lnTo>
-                    <a:pt x="5085199" y="724457"/>
-                  </a:lnTo>
-                  <a:lnTo>
-                    <a:pt x="5013576" y="714658"/>
-                  </a:lnTo>
-                  <a:lnTo>
-                    <a:pt x="4941954" y="703904"/>
-                  </a:lnTo>
-                  <a:lnTo>
-                    <a:pt x="4870331" y="692100"/>
-                  </a:lnTo>
-                  <a:lnTo>
-                    <a:pt x="4798709" y="679145"/>
-                  </a:lnTo>
-                  <a:lnTo>
-                    <a:pt x="4727086" y="664926"/>
-                  </a:lnTo>
-                  <a:lnTo>
-                    <a:pt x="4655464" y="649320"/>
-                  </a:lnTo>
-                  <a:lnTo>
-                    <a:pt x="4583841" y="632192"/>
-                  </a:lnTo>
-                  <a:lnTo>
-                    <a:pt x="4512219" y="613393"/>
-                  </a:lnTo>
-                  <a:lnTo>
-                    <a:pt x="4440596" y="592760"/>
-                  </a:lnTo>
-                  <a:lnTo>
-                    <a:pt x="4368974" y="570114"/>
-                  </a:lnTo>
-                  <a:lnTo>
-                    <a:pt x="4297351" y="545259"/>
-                  </a:lnTo>
-                  <a:lnTo>
-                    <a:pt x="4225729" y="517980"/>
-                  </a:lnTo>
-                  <a:lnTo>
-                    <a:pt x="4154106" y="488039"/>
-                  </a:lnTo>
-                  <a:lnTo>
-                    <a:pt x="4082483" y="455178"/>
-                  </a:lnTo>
-                  <a:lnTo>
-                    <a:pt x="4010861" y="419111"/>
-                  </a:lnTo>
-                  <a:lnTo>
-                    <a:pt x="3939238" y="379526"/>
-                  </a:lnTo>
-                  <a:lnTo>
-                    <a:pt x="3867616" y="336080"/>
-                  </a:lnTo>
-                  <a:lnTo>
-                    <a:pt x="3795993" y="288395"/>
-                  </a:lnTo>
-                  <a:lnTo>
-                    <a:pt x="3724371" y="236059"/>
-                  </a:lnTo>
-                  <a:lnTo>
-                    <a:pt x="3652748" y="178617"/>
-                  </a:lnTo>
-                  <a:lnTo>
-                    <a:pt x="3581126" y="115572"/>
-                  </a:lnTo>
-                  <a:lnTo>
-                    <a:pt x="3509503" y="46376"/>
+                    <a:pt x="7019007" y="813531"/>
+                  </a:lnTo>
+                  <a:lnTo>
+                    <a:pt x="6947385" y="812725"/>
+                  </a:lnTo>
+                  <a:lnTo>
+                    <a:pt x="6875762" y="811842"/>
+                  </a:lnTo>
+                  <a:lnTo>
+                    <a:pt x="6804139" y="810871"/>
+                  </a:lnTo>
+                  <a:lnTo>
+                    <a:pt x="6732517" y="809806"/>
+                  </a:lnTo>
+                  <a:lnTo>
+                    <a:pt x="6660894" y="808637"/>
+                  </a:lnTo>
+                  <a:lnTo>
+                    <a:pt x="6589272" y="807354"/>
+                  </a:lnTo>
+                  <a:lnTo>
+                    <a:pt x="6517649" y="805945"/>
+                  </a:lnTo>
+                  <a:lnTo>
+                    <a:pt x="6446027" y="804399"/>
+                  </a:lnTo>
+                  <a:lnTo>
+                    <a:pt x="6374404" y="802701"/>
+                  </a:lnTo>
+                  <a:lnTo>
+                    <a:pt x="6302782" y="800837"/>
+                  </a:lnTo>
+                  <a:lnTo>
+                    <a:pt x="6231159" y="798792"/>
+                  </a:lnTo>
+                  <a:lnTo>
+                    <a:pt x="6159537" y="796546"/>
+                  </a:lnTo>
+                  <a:lnTo>
+                    <a:pt x="6087914" y="794081"/>
+                  </a:lnTo>
+                  <a:lnTo>
+                    <a:pt x="6016292" y="791375"/>
+                  </a:lnTo>
+                  <a:lnTo>
+                    <a:pt x="5944669" y="788405"/>
+                  </a:lnTo>
+                  <a:lnTo>
+                    <a:pt x="5873047" y="785144"/>
+                  </a:lnTo>
+                  <a:lnTo>
+                    <a:pt x="5801424" y="781565"/>
+                  </a:lnTo>
+                  <a:lnTo>
+                    <a:pt x="5729802" y="777636"/>
+                  </a:lnTo>
+                  <a:lnTo>
+                    <a:pt x="5658179" y="773323"/>
+                  </a:lnTo>
+                  <a:lnTo>
+                    <a:pt x="5586557" y="768588"/>
+                  </a:lnTo>
+                  <a:lnTo>
+                    <a:pt x="5514934" y="763391"/>
+                  </a:lnTo>
+                  <a:lnTo>
+                    <a:pt x="5443311" y="757685"/>
+                  </a:lnTo>
+                  <a:lnTo>
+                    <a:pt x="5371689" y="751423"/>
+                  </a:lnTo>
+                  <a:lnTo>
+                    <a:pt x="5300066" y="744548"/>
+                  </a:lnTo>
+                  <a:lnTo>
+                    <a:pt x="5228444" y="737001"/>
+                  </a:lnTo>
+                  <a:lnTo>
+                    <a:pt x="5156821" y="728716"/>
+                  </a:lnTo>
+                  <a:lnTo>
+                    <a:pt x="5085199" y="719622"/>
+                  </a:lnTo>
+                  <a:lnTo>
+                    <a:pt x="5013576" y="709640"/>
+                  </a:lnTo>
+                  <a:lnTo>
+                    <a:pt x="4941954" y="698681"/>
+                  </a:lnTo>
+                  <a:lnTo>
+                    <a:pt x="4870331" y="686652"/>
+                  </a:lnTo>
+                  <a:lnTo>
+                    <a:pt x="4798709" y="673447"/>
+                  </a:lnTo>
+                  <a:lnTo>
+                    <a:pt x="4727086" y="658952"/>
+                  </a:lnTo>
+                  <a:lnTo>
+                    <a:pt x="4655464" y="643040"/>
+                  </a:lnTo>
+                  <a:lnTo>
+                    <a:pt x="4583841" y="625573"/>
+                  </a:lnTo>
+                  <a:lnTo>
+                    <a:pt x="4512219" y="606398"/>
+                  </a:lnTo>
+                  <a:lnTo>
+                    <a:pt x="4440596" y="585350"/>
+                  </a:lnTo>
+                  <a:lnTo>
+                    <a:pt x="4368974" y="562245"/>
+                  </a:lnTo>
+                  <a:lnTo>
+                    <a:pt x="4297351" y="536882"/>
+                  </a:lnTo>
+                  <a:lnTo>
+                    <a:pt x="4225729" y="509040"/>
+                  </a:lnTo>
+                  <a:lnTo>
+                    <a:pt x="4154106" y="478477"/>
+                  </a:lnTo>
+                  <a:lnTo>
+                    <a:pt x="4082483" y="444928"/>
+                  </a:lnTo>
+                  <a:lnTo>
+                    <a:pt x="4010861" y="408099"/>
+                  </a:lnTo>
+                  <a:lnTo>
+                    <a:pt x="3939238" y="367672"/>
+                  </a:lnTo>
+                  <a:lnTo>
+                    <a:pt x="3867616" y="323293"/>
+                  </a:lnTo>
+                  <a:lnTo>
+                    <a:pt x="3795993" y="274577"/>
+                  </a:lnTo>
+                  <a:lnTo>
+                    <a:pt x="3724371" y="221100"/>
+                  </a:lnTo>
+                  <a:lnTo>
+                    <a:pt x="3652748" y="162397"/>
+                  </a:lnTo>
+                  <a:lnTo>
+                    <a:pt x="3581126" y="97958"/>
+                  </a:lnTo>
+                  <a:lnTo>
+                    <a:pt x="3509503" y="27220"/>
                   </a:lnTo>
                   <a:lnTo>
                     <a:pt x="3437881" y="0"/>
                   </a:lnTo>
                   <a:lnTo>
-                    <a:pt x="3366258" y="14120"/>
-                  </a:lnTo>
-                  <a:lnTo>
-                    <a:pt x="3294636" y="27998"/>
-                  </a:lnTo>
-                  <a:lnTo>
-                    <a:pt x="3223013" y="41639"/>
-                  </a:lnTo>
-                  <a:lnTo>
-                    <a:pt x="3151391" y="55047"/>
-                  </a:lnTo>
-                  <a:lnTo>
-                    <a:pt x="3079768" y="68225"/>
-                  </a:lnTo>
-                  <a:lnTo>
-                    <a:pt x="3008146" y="81177"/>
-                  </a:lnTo>
-                  <a:lnTo>
-                    <a:pt x="2936523" y="93908"/>
-                  </a:lnTo>
-                  <a:lnTo>
-                    <a:pt x="2864901" y="106421"/>
-                  </a:lnTo>
-                  <a:lnTo>
-                    <a:pt x="2793278" y="118720"/>
-                  </a:lnTo>
-                  <a:lnTo>
-                    <a:pt x="2721655" y="130808"/>
-                  </a:lnTo>
-                  <a:lnTo>
-                    <a:pt x="2650033" y="142689"/>
-                  </a:lnTo>
-                  <a:lnTo>
-                    <a:pt x="2578410" y="154367"/>
-                  </a:lnTo>
-                  <a:lnTo>
-                    <a:pt x="2506788" y="165845"/>
-                  </a:lnTo>
-                  <a:lnTo>
-                    <a:pt x="2435165" y="177126"/>
-                  </a:lnTo>
-                  <a:lnTo>
-                    <a:pt x="2363543" y="188214"/>
-                  </a:lnTo>
-                  <a:lnTo>
-                    <a:pt x="2291920" y="199113"/>
-                  </a:lnTo>
-                  <a:lnTo>
-                    <a:pt x="2220298" y="209825"/>
-                  </a:lnTo>
-                  <a:lnTo>
-                    <a:pt x="2148675" y="220354"/>
-                  </a:lnTo>
-                  <a:lnTo>
-                    <a:pt x="2077053" y="230702"/>
-                  </a:lnTo>
-                  <a:lnTo>
-                    <a:pt x="2005430" y="240873"/>
-                  </a:lnTo>
-                  <a:lnTo>
-                    <a:pt x="1933808" y="250870"/>
-                  </a:lnTo>
-                  <a:lnTo>
-                    <a:pt x="1862185" y="260696"/>
-                  </a:lnTo>
-                  <a:lnTo>
-                    <a:pt x="1790563" y="270354"/>
-                  </a:lnTo>
-                  <a:lnTo>
-                    <a:pt x="1718940" y="279847"/>
-                  </a:lnTo>
-                  <a:lnTo>
-                    <a:pt x="1647318" y="289177"/>
-                  </a:lnTo>
-                  <a:lnTo>
-                    <a:pt x="1575695" y="298347"/>
-                  </a:lnTo>
-                  <a:lnTo>
-                    <a:pt x="1504073" y="307360"/>
-                  </a:lnTo>
-                  <a:lnTo>
-                    <a:pt x="1432450" y="316219"/>
-                  </a:lnTo>
-                  <a:lnTo>
-                    <a:pt x="1360827" y="324927"/>
-                  </a:lnTo>
-                  <a:lnTo>
-                    <a:pt x="1289205" y="333485"/>
-                  </a:lnTo>
-                  <a:lnTo>
-                    <a:pt x="1217582" y="341897"/>
-                  </a:lnTo>
-                  <a:lnTo>
-                    <a:pt x="1145960" y="350165"/>
-                  </a:lnTo>
-                  <a:lnTo>
-                    <a:pt x="1074337" y="358291"/>
-                  </a:lnTo>
-                  <a:lnTo>
-                    <a:pt x="1002715" y="366279"/>
-                  </a:lnTo>
-                  <a:lnTo>
-                    <a:pt x="931092" y="374129"/>
-                  </a:lnTo>
-                  <a:lnTo>
-                    <a:pt x="859470" y="381845"/>
-                  </a:lnTo>
-                  <a:lnTo>
-                    <a:pt x="787847" y="389429"/>
-                  </a:lnTo>
-                  <a:lnTo>
-                    <a:pt x="716225" y="396884"/>
-                  </a:lnTo>
-                  <a:lnTo>
-                    <a:pt x="644602" y="404210"/>
-                  </a:lnTo>
-                  <a:lnTo>
-                    <a:pt x="572980" y="411411"/>
-                  </a:lnTo>
-                  <a:lnTo>
-                    <a:pt x="501357" y="418489"/>
-                  </a:lnTo>
-                  <a:lnTo>
-                    <a:pt x="429735" y="425446"/>
-                  </a:lnTo>
-                  <a:lnTo>
-                    <a:pt x="358112" y="432284"/>
-                  </a:lnTo>
-                  <a:lnTo>
-                    <a:pt x="286490" y="439005"/>
-                  </a:lnTo>
-                  <a:lnTo>
-                    <a:pt x="214867" y="445610"/>
-                  </a:lnTo>
-                  <a:lnTo>
-                    <a:pt x="143245" y="452103"/>
-                  </a:lnTo>
-                  <a:lnTo>
-                    <a:pt x="71622" y="458484"/>
-                  </a:lnTo>
-                  <a:lnTo>
-                    <a:pt x="0" y="464756"/>
+                    <a:pt x="3366258" y="14091"/>
+                  </a:lnTo>
+                  <a:lnTo>
+                    <a:pt x="3294636" y="27940"/>
+                  </a:lnTo>
+                  <a:lnTo>
+                    <a:pt x="3223013" y="41552"/>
+                  </a:lnTo>
+                  <a:lnTo>
+                    <a:pt x="3151391" y="54930"/>
+                  </a:lnTo>
+                  <a:lnTo>
+                    <a:pt x="3079768" y="68080"/>
+                  </a:lnTo>
+                  <a:lnTo>
+                    <a:pt x="3008146" y="81003"/>
+                  </a:lnTo>
+                  <a:lnTo>
+                    <a:pt x="2936523" y="93705"/>
+                  </a:lnTo>
+                  <a:lnTo>
+                    <a:pt x="2864901" y="106189"/>
+                  </a:lnTo>
+                  <a:lnTo>
+                    <a:pt x="2793278" y="118460"/>
+                  </a:lnTo>
+                  <a:lnTo>
+                    <a:pt x="2721655" y="130519"/>
+                  </a:lnTo>
+                  <a:lnTo>
+                    <a:pt x="2650033" y="142372"/>
+                  </a:lnTo>
+                  <a:lnTo>
+                    <a:pt x="2578410" y="154022"/>
+                  </a:lnTo>
+                  <a:lnTo>
+                    <a:pt x="2506788" y="165472"/>
+                  </a:lnTo>
+                  <a:lnTo>
+                    <a:pt x="2435165" y="176726"/>
+                  </a:lnTo>
+                  <a:lnTo>
+                    <a:pt x="2363543" y="187786"/>
+                  </a:lnTo>
+                  <a:lnTo>
+                    <a:pt x="2291920" y="198657"/>
+                  </a:lnTo>
+                  <a:lnTo>
+                    <a:pt x="2220298" y="209342"/>
+                  </a:lnTo>
+                  <a:lnTo>
+                    <a:pt x="2148675" y="219843"/>
+                  </a:lnTo>
+                  <a:lnTo>
+                    <a:pt x="2077053" y="230165"/>
+                  </a:lnTo>
+                  <a:lnTo>
+                    <a:pt x="2005430" y="240309"/>
+                  </a:lnTo>
+                  <a:lnTo>
+                    <a:pt x="1933808" y="250279"/>
+                  </a:lnTo>
+                  <a:lnTo>
+                    <a:pt x="1862185" y="260079"/>
+                  </a:lnTo>
+                  <a:lnTo>
+                    <a:pt x="1790563" y="269710"/>
+                  </a:lnTo>
+                  <a:lnTo>
+                    <a:pt x="1718940" y="279177"/>
+                  </a:lnTo>
+                  <a:lnTo>
+                    <a:pt x="1647318" y="288481"/>
+                  </a:lnTo>
+                  <a:lnTo>
+                    <a:pt x="1575695" y="297625"/>
+                  </a:lnTo>
+                  <a:lnTo>
+                    <a:pt x="1504073" y="306612"/>
+                  </a:lnTo>
+                  <a:lnTo>
+                    <a:pt x="1432450" y="315446"/>
+                  </a:lnTo>
+                  <a:lnTo>
+                    <a:pt x="1360827" y="324128"/>
+                  </a:lnTo>
+                  <a:lnTo>
+                    <a:pt x="1289205" y="332661"/>
+                  </a:lnTo>
+                  <a:lnTo>
+                    <a:pt x="1217582" y="341048"/>
+                  </a:lnTo>
+                  <a:lnTo>
+                    <a:pt x="1145960" y="349291"/>
+                  </a:lnTo>
+                  <a:lnTo>
+                    <a:pt x="1074337" y="357393"/>
+                  </a:lnTo>
+                  <a:lnTo>
+                    <a:pt x="1002715" y="365355"/>
+                  </a:lnTo>
+                  <a:lnTo>
+                    <a:pt x="931092" y="373182"/>
+                  </a:lnTo>
+                  <a:lnTo>
+                    <a:pt x="859470" y="380874"/>
+                  </a:lnTo>
+                  <a:lnTo>
+                    <a:pt x="787847" y="388434"/>
+                  </a:lnTo>
+                  <a:lnTo>
+                    <a:pt x="716225" y="395864"/>
+                  </a:lnTo>
+                  <a:lnTo>
+                    <a:pt x="644602" y="403167"/>
+                  </a:lnTo>
+                  <a:lnTo>
+                    <a:pt x="572980" y="410345"/>
+                  </a:lnTo>
+                  <a:lnTo>
+                    <a:pt x="501357" y="417400"/>
+                  </a:lnTo>
+                  <a:lnTo>
+                    <a:pt x="429735" y="424334"/>
+                  </a:lnTo>
+                  <a:lnTo>
+                    <a:pt x="358112" y="431149"/>
+                  </a:lnTo>
+                  <a:lnTo>
+                    <a:pt x="286490" y="437847"/>
+                  </a:lnTo>
+                  <a:lnTo>
+                    <a:pt x="214867" y="444430"/>
+                  </a:lnTo>
+                  <a:lnTo>
+                    <a:pt x="143245" y="450900"/>
+                  </a:lnTo>
+                  <a:lnTo>
+                    <a:pt x="71622" y="457259"/>
+                  </a:lnTo>
+                  <a:lnTo>
+                    <a:pt x="0" y="463510"/>
                   </a:lnTo>
                 </a:path>
               </a:pathLst>
@@ -4137,282 +4131,282 @@
           </p:nvSpPr>
           <p:spPr>
             <a:xfrm>
-              <a:off x="1921658" y="2073503"/>
-              <a:ext cx="6341020" cy="3362284"/>
+              <a:off x="1942070" y="2073503"/>
+              <a:ext cx="6320608" cy="3361680"/>
             </a:xfrm>
             <a:custGeom>
               <a:avLst/>
               <a:pathLst>
-                <a:path w="6341020" h="3362284">
+                <a:path w="6320608" h="3361680">
                   <a:moveTo>
                     <a:pt x="0" y="0"/>
                   </a:moveTo>
                   <a:lnTo>
-                    <a:pt x="38238" y="70405"/>
-                  </a:lnTo>
-                  <a:lnTo>
-                    <a:pt x="109860" y="197374"/>
-                  </a:lnTo>
-                  <a:lnTo>
-                    <a:pt x="181483" y="319620"/>
-                  </a:lnTo>
-                  <a:lnTo>
-                    <a:pt x="253105" y="437318"/>
-                  </a:lnTo>
-                  <a:lnTo>
-                    <a:pt x="324728" y="550639"/>
-                  </a:lnTo>
-                  <a:lnTo>
-                    <a:pt x="396350" y="659744"/>
-                  </a:lnTo>
-                  <a:lnTo>
-                    <a:pt x="467973" y="764791"/>
-                  </a:lnTo>
-                  <a:lnTo>
-                    <a:pt x="539595" y="865930"/>
-                  </a:lnTo>
-                  <a:lnTo>
-                    <a:pt x="611218" y="963307"/>
-                  </a:lnTo>
-                  <a:lnTo>
-                    <a:pt x="682840" y="1057062"/>
-                  </a:lnTo>
-                  <a:lnTo>
-                    <a:pt x="754463" y="1147329"/>
-                  </a:lnTo>
-                  <a:lnTo>
-                    <a:pt x="826086" y="1234238"/>
-                  </a:lnTo>
-                  <a:lnTo>
-                    <a:pt x="897708" y="1317915"/>
-                  </a:lnTo>
-                  <a:lnTo>
-                    <a:pt x="969331" y="1398479"/>
-                  </a:lnTo>
-                  <a:lnTo>
-                    <a:pt x="1040953" y="1476047"/>
-                  </a:lnTo>
-                  <a:lnTo>
-                    <a:pt x="1112576" y="1550729"/>
-                  </a:lnTo>
-                  <a:lnTo>
-                    <a:pt x="1184198" y="1622633"/>
-                  </a:lnTo>
-                  <a:lnTo>
-                    <a:pt x="1255821" y="1691862"/>
-                  </a:lnTo>
-                  <a:lnTo>
-                    <a:pt x="1327443" y="1758516"/>
-                  </a:lnTo>
-                  <a:lnTo>
-                    <a:pt x="1399066" y="1822691"/>
-                  </a:lnTo>
-                  <a:lnTo>
-                    <a:pt x="1470688" y="1884478"/>
-                  </a:lnTo>
-                  <a:lnTo>
-                    <a:pt x="1542311" y="1943968"/>
-                  </a:lnTo>
-                  <a:lnTo>
-                    <a:pt x="1613933" y="2001244"/>
-                  </a:lnTo>
-                  <a:lnTo>
-                    <a:pt x="1685556" y="2056390"/>
-                  </a:lnTo>
-                  <a:lnTo>
-                    <a:pt x="1757178" y="2109484"/>
-                  </a:lnTo>
-                  <a:lnTo>
-                    <a:pt x="1828801" y="2160604"/>
-                  </a:lnTo>
-                  <a:lnTo>
-                    <a:pt x="1900423" y="2209822"/>
-                  </a:lnTo>
-                  <a:lnTo>
-                    <a:pt x="1972046" y="2257209"/>
-                  </a:lnTo>
-                  <a:lnTo>
-                    <a:pt x="2043668" y="2302834"/>
-                  </a:lnTo>
-                  <a:lnTo>
-                    <a:pt x="2115291" y="2346761"/>
-                  </a:lnTo>
-                  <a:lnTo>
-                    <a:pt x="2186914" y="2389054"/>
-                  </a:lnTo>
-                  <a:lnTo>
-                    <a:pt x="2258536" y="2429774"/>
-                  </a:lnTo>
-                  <a:lnTo>
-                    <a:pt x="2330159" y="2468980"/>
-                  </a:lnTo>
-                  <a:lnTo>
-                    <a:pt x="2401781" y="2506727"/>
-                  </a:lnTo>
-                  <a:lnTo>
-                    <a:pt x="2473404" y="2543070"/>
-                  </a:lnTo>
-                  <a:lnTo>
-                    <a:pt x="2545026" y="2578061"/>
-                  </a:lnTo>
-                  <a:lnTo>
-                    <a:pt x="2616649" y="2611750"/>
-                  </a:lnTo>
-                  <a:lnTo>
-                    <a:pt x="2688271" y="2644187"/>
-                  </a:lnTo>
-                  <a:lnTo>
-                    <a:pt x="2759894" y="2675417"/>
-                  </a:lnTo>
-                  <a:lnTo>
-                    <a:pt x="2831516" y="2705485"/>
-                  </a:lnTo>
-                  <a:lnTo>
-                    <a:pt x="2903139" y="2734434"/>
-                  </a:lnTo>
-                  <a:lnTo>
-                    <a:pt x="2974761" y="2762307"/>
-                  </a:lnTo>
-                  <a:lnTo>
-                    <a:pt x="3046384" y="2789143"/>
-                  </a:lnTo>
-                  <a:lnTo>
-                    <a:pt x="3118006" y="2814981"/>
-                  </a:lnTo>
-                  <a:lnTo>
-                    <a:pt x="3189629" y="2839857"/>
-                  </a:lnTo>
-                  <a:lnTo>
-                    <a:pt x="3261251" y="2863809"/>
-                  </a:lnTo>
-                  <a:lnTo>
-                    <a:pt x="3332874" y="2886869"/>
-                  </a:lnTo>
-                  <a:lnTo>
-                    <a:pt x="3404496" y="2909071"/>
-                  </a:lnTo>
-                  <a:lnTo>
-                    <a:pt x="3476119" y="2930448"/>
-                  </a:lnTo>
-                  <a:lnTo>
-                    <a:pt x="3547742" y="2951030"/>
-                  </a:lnTo>
-                  <a:lnTo>
-                    <a:pt x="3619364" y="2970845"/>
-                  </a:lnTo>
-                  <a:lnTo>
-                    <a:pt x="3690987" y="2989924"/>
-                  </a:lnTo>
-                  <a:lnTo>
-                    <a:pt x="3762609" y="3008293"/>
-                  </a:lnTo>
-                  <a:lnTo>
-                    <a:pt x="3834232" y="3025979"/>
-                  </a:lnTo>
-                  <a:lnTo>
-                    <a:pt x="3905854" y="3043007"/>
-                  </a:lnTo>
-                  <a:lnTo>
-                    <a:pt x="3977477" y="3059402"/>
-                  </a:lnTo>
-                  <a:lnTo>
-                    <a:pt x="4049099" y="3075186"/>
-                  </a:lnTo>
-                  <a:lnTo>
-                    <a:pt x="4120722" y="3090384"/>
-                  </a:lnTo>
-                  <a:lnTo>
-                    <a:pt x="4192344" y="3105016"/>
-                  </a:lnTo>
-                  <a:lnTo>
-                    <a:pt x="4263967" y="3119104"/>
-                  </a:lnTo>
-                  <a:lnTo>
-                    <a:pt x="4335589" y="3132668"/>
-                  </a:lnTo>
-                  <a:lnTo>
-                    <a:pt x="4407212" y="3145727"/>
-                  </a:lnTo>
-                  <a:lnTo>
-                    <a:pt x="4478834" y="3158301"/>
-                  </a:lnTo>
-                  <a:lnTo>
-                    <a:pt x="4550457" y="3170407"/>
-                  </a:lnTo>
-                  <a:lnTo>
-                    <a:pt x="4622079" y="3182062"/>
-                  </a:lnTo>
-                  <a:lnTo>
-                    <a:pt x="4693702" y="3193284"/>
-                  </a:lnTo>
-                  <a:lnTo>
-                    <a:pt x="4765324" y="3204089"/>
-                  </a:lnTo>
-                  <a:lnTo>
-                    <a:pt x="4836947" y="3214491"/>
-                  </a:lnTo>
-                  <a:lnTo>
-                    <a:pt x="4908570" y="3224507"/>
-                  </a:lnTo>
-                  <a:lnTo>
-                    <a:pt x="4980192" y="3234150"/>
-                  </a:lnTo>
-                  <a:lnTo>
-                    <a:pt x="5051815" y="3243435"/>
-                  </a:lnTo>
-                  <a:lnTo>
-                    <a:pt x="5123437" y="3252374"/>
-                  </a:lnTo>
-                  <a:lnTo>
-                    <a:pt x="5195060" y="3260980"/>
-                  </a:lnTo>
-                  <a:lnTo>
-                    <a:pt x="5266682" y="3269267"/>
-                  </a:lnTo>
-                  <a:lnTo>
-                    <a:pt x="5338305" y="3277245"/>
-                  </a:lnTo>
-                  <a:lnTo>
-                    <a:pt x="5409927" y="3284926"/>
-                  </a:lnTo>
-                  <a:lnTo>
-                    <a:pt x="5481550" y="3292322"/>
-                  </a:lnTo>
-                  <a:lnTo>
-                    <a:pt x="5553172" y="3299442"/>
-                  </a:lnTo>
-                  <a:lnTo>
-                    <a:pt x="5624795" y="3306298"/>
-                  </a:lnTo>
-                  <a:lnTo>
-                    <a:pt x="5696417" y="3312899"/>
-                  </a:lnTo>
-                  <a:lnTo>
-                    <a:pt x="5768040" y="3319254"/>
-                  </a:lnTo>
-                  <a:lnTo>
-                    <a:pt x="5839662" y="3325373"/>
-                  </a:lnTo>
-                  <a:lnTo>
-                    <a:pt x="5911285" y="3331264"/>
-                  </a:lnTo>
-                  <a:lnTo>
-                    <a:pt x="5982907" y="3336936"/>
-                  </a:lnTo>
-                  <a:lnTo>
-                    <a:pt x="6054530" y="3342397"/>
-                  </a:lnTo>
-                  <a:lnTo>
-                    <a:pt x="6126152" y="3347655"/>
-                  </a:lnTo>
-                  <a:lnTo>
-                    <a:pt x="6197775" y="3352717"/>
-                  </a:lnTo>
-                  <a:lnTo>
-                    <a:pt x="6269398" y="3357591"/>
-                  </a:lnTo>
-                  <a:lnTo>
-                    <a:pt x="6341020" y="3362284"/>
+                    <a:pt x="17826" y="33239"/>
+                  </a:lnTo>
+                  <a:lnTo>
+                    <a:pt x="89449" y="161812"/>
+                  </a:lnTo>
+                  <a:lnTo>
+                    <a:pt x="161071" y="285594"/>
+                  </a:lnTo>
+                  <a:lnTo>
+                    <a:pt x="232694" y="404764"/>
+                  </a:lnTo>
+                  <a:lnTo>
+                    <a:pt x="304316" y="519493"/>
+                  </a:lnTo>
+                  <a:lnTo>
+                    <a:pt x="375939" y="629947"/>
+                  </a:lnTo>
+                  <a:lnTo>
+                    <a:pt x="447561" y="736285"/>
+                  </a:lnTo>
+                  <a:lnTo>
+                    <a:pt x="519184" y="838661"/>
+                  </a:lnTo>
+                  <a:lnTo>
+                    <a:pt x="590806" y="937222"/>
+                  </a:lnTo>
+                  <a:lnTo>
+                    <a:pt x="662429" y="1032111"/>
+                  </a:lnTo>
+                  <a:lnTo>
+                    <a:pt x="734051" y="1123463"/>
+                  </a:lnTo>
+                  <a:lnTo>
+                    <a:pt x="805674" y="1211412"/>
+                  </a:lnTo>
+                  <a:lnTo>
+                    <a:pt x="877296" y="1296084"/>
+                  </a:lnTo>
+                  <a:lnTo>
+                    <a:pt x="948919" y="1377601"/>
+                  </a:lnTo>
+                  <a:lnTo>
+                    <a:pt x="1020541" y="1456080"/>
+                  </a:lnTo>
+                  <a:lnTo>
+                    <a:pt x="1092164" y="1531635"/>
+                  </a:lnTo>
+                  <a:lnTo>
+                    <a:pt x="1163786" y="1604374"/>
+                  </a:lnTo>
+                  <a:lnTo>
+                    <a:pt x="1235409" y="1674404"/>
+                  </a:lnTo>
+                  <a:lnTo>
+                    <a:pt x="1307032" y="1741823"/>
+                  </a:lnTo>
+                  <a:lnTo>
+                    <a:pt x="1378654" y="1806731"/>
+                  </a:lnTo>
+                  <a:lnTo>
+                    <a:pt x="1450277" y="1869220"/>
+                  </a:lnTo>
+                  <a:lnTo>
+                    <a:pt x="1521899" y="1929380"/>
+                  </a:lnTo>
+                  <a:lnTo>
+                    <a:pt x="1593522" y="1987299"/>
+                  </a:lnTo>
+                  <a:lnTo>
+                    <a:pt x="1665144" y="2043060"/>
+                  </a:lnTo>
+                  <a:lnTo>
+                    <a:pt x="1736767" y="2096743"/>
+                  </a:lnTo>
+                  <a:lnTo>
+                    <a:pt x="1808389" y="2148425"/>
+                  </a:lnTo>
+                  <a:lnTo>
+                    <a:pt x="1880012" y="2198182"/>
+                  </a:lnTo>
+                  <a:lnTo>
+                    <a:pt x="1951634" y="2246085"/>
+                  </a:lnTo>
+                  <a:lnTo>
+                    <a:pt x="2023257" y="2292202"/>
+                  </a:lnTo>
+                  <a:lnTo>
+                    <a:pt x="2094879" y="2336602"/>
+                  </a:lnTo>
+                  <a:lnTo>
+                    <a:pt x="2166502" y="2379347"/>
+                  </a:lnTo>
+                  <a:lnTo>
+                    <a:pt x="2238124" y="2420499"/>
+                  </a:lnTo>
+                  <a:lnTo>
+                    <a:pt x="2309747" y="2460117"/>
+                  </a:lnTo>
+                  <a:lnTo>
+                    <a:pt x="2381369" y="2498260"/>
+                  </a:lnTo>
+                  <a:lnTo>
+                    <a:pt x="2452992" y="2534981"/>
+                  </a:lnTo>
+                  <a:lnTo>
+                    <a:pt x="2524614" y="2570334"/>
+                  </a:lnTo>
+                  <a:lnTo>
+                    <a:pt x="2596237" y="2604370"/>
+                  </a:lnTo>
+                  <a:lnTo>
+                    <a:pt x="2667859" y="2637137"/>
+                  </a:lnTo>
+                  <a:lnTo>
+                    <a:pt x="2739482" y="2668683"/>
+                  </a:lnTo>
+                  <a:lnTo>
+                    <a:pt x="2811105" y="2699054"/>
+                  </a:lnTo>
+                  <a:lnTo>
+                    <a:pt x="2882727" y="2728293"/>
+                  </a:lnTo>
+                  <a:lnTo>
+                    <a:pt x="2954350" y="2756443"/>
+                  </a:lnTo>
+                  <a:lnTo>
+                    <a:pt x="3025972" y="2783544"/>
+                  </a:lnTo>
+                  <a:lnTo>
+                    <a:pt x="3097595" y="2809635"/>
+                  </a:lnTo>
+                  <a:lnTo>
+                    <a:pt x="3169217" y="2834754"/>
+                  </a:lnTo>
+                  <a:lnTo>
+                    <a:pt x="3240840" y="2858936"/>
+                  </a:lnTo>
+                  <a:lnTo>
+                    <a:pt x="3312462" y="2882218"/>
+                  </a:lnTo>
+                  <a:lnTo>
+                    <a:pt x="3384085" y="2904632"/>
+                  </a:lnTo>
+                  <a:lnTo>
+                    <a:pt x="3455707" y="2926211"/>
+                  </a:lnTo>
+                  <a:lnTo>
+                    <a:pt x="3527330" y="2946986"/>
+                  </a:lnTo>
+                  <a:lnTo>
+                    <a:pt x="3598952" y="2966987"/>
+                  </a:lnTo>
+                  <a:lnTo>
+                    <a:pt x="3670575" y="2986242"/>
+                  </a:lnTo>
+                  <a:lnTo>
+                    <a:pt x="3742197" y="3004780"/>
+                  </a:lnTo>
+                  <a:lnTo>
+                    <a:pt x="3813820" y="3022627"/>
+                  </a:lnTo>
+                  <a:lnTo>
+                    <a:pt x="3885442" y="3039810"/>
+                  </a:lnTo>
+                  <a:lnTo>
+                    <a:pt x="3957065" y="3056352"/>
+                  </a:lnTo>
+                  <a:lnTo>
+                    <a:pt x="4028687" y="3072277"/>
+                  </a:lnTo>
+                  <a:lnTo>
+                    <a:pt x="4100310" y="3087609"/>
+                  </a:lnTo>
+                  <a:lnTo>
+                    <a:pt x="4171933" y="3102370"/>
+                  </a:lnTo>
+                  <a:lnTo>
+                    <a:pt x="4243555" y="3116581"/>
+                  </a:lnTo>
+                  <a:lnTo>
+                    <a:pt x="4315178" y="3130262"/>
+                  </a:lnTo>
+                  <a:lnTo>
+                    <a:pt x="4386800" y="3143434"/>
+                  </a:lnTo>
+                  <a:lnTo>
+                    <a:pt x="4458423" y="3156115"/>
+                  </a:lnTo>
+                  <a:lnTo>
+                    <a:pt x="4530045" y="3168323"/>
+                  </a:lnTo>
+                  <a:lnTo>
+                    <a:pt x="4601668" y="3180076"/>
+                  </a:lnTo>
+                  <a:lnTo>
+                    <a:pt x="4673290" y="3191392"/>
+                  </a:lnTo>
+                  <a:lnTo>
+                    <a:pt x="4744913" y="3202285"/>
+                  </a:lnTo>
+                  <a:lnTo>
+                    <a:pt x="4816535" y="3212773"/>
+                  </a:lnTo>
+                  <a:lnTo>
+                    <a:pt x="4888158" y="3222870"/>
+                  </a:lnTo>
+                  <a:lnTo>
+                    <a:pt x="4959780" y="3232591"/>
+                  </a:lnTo>
+                  <a:lnTo>
+                    <a:pt x="5031403" y="3241949"/>
+                  </a:lnTo>
+                  <a:lnTo>
+                    <a:pt x="5103025" y="3250959"/>
+                  </a:lnTo>
+                  <a:lnTo>
+                    <a:pt x="5174648" y="3259633"/>
+                  </a:lnTo>
+                  <a:lnTo>
+                    <a:pt x="5246270" y="3267984"/>
+                  </a:lnTo>
+                  <a:lnTo>
+                    <a:pt x="5317893" y="3276024"/>
+                  </a:lnTo>
+                  <a:lnTo>
+                    <a:pt x="5389515" y="3283764"/>
+                  </a:lnTo>
+                  <a:lnTo>
+                    <a:pt x="5461138" y="3291216"/>
+                  </a:lnTo>
+                  <a:lnTo>
+                    <a:pt x="5532761" y="3298390"/>
+                  </a:lnTo>
+                  <a:lnTo>
+                    <a:pt x="5604383" y="3305297"/>
+                  </a:lnTo>
+                  <a:lnTo>
+                    <a:pt x="5676006" y="3311946"/>
+                  </a:lnTo>
+                  <a:lnTo>
+                    <a:pt x="5747628" y="3318348"/>
+                  </a:lnTo>
+                  <a:lnTo>
+                    <a:pt x="5819251" y="3324511"/>
+                  </a:lnTo>
+                  <a:lnTo>
+                    <a:pt x="5890873" y="3330444"/>
+                  </a:lnTo>
+                  <a:lnTo>
+                    <a:pt x="5962496" y="3336157"/>
+                  </a:lnTo>
+                  <a:lnTo>
+                    <a:pt x="6034118" y="3341656"/>
+                  </a:lnTo>
+                  <a:lnTo>
+                    <a:pt x="6105741" y="3346951"/>
+                  </a:lnTo>
+                  <a:lnTo>
+                    <a:pt x="6177363" y="3352048"/>
+                  </a:lnTo>
+                  <a:lnTo>
+                    <a:pt x="6248986" y="3356955"/>
+                  </a:lnTo>
+                  <a:lnTo>
+                    <a:pt x="6320608" y="3361680"/>
                   </a:lnTo>
                 </a:path>
               </a:pathLst>
@@ -4484,7 +4478,7 @@
           </p:nvSpPr>
           <p:spPr>
             <a:xfrm>
-              <a:off x="4632789" y="2073503"/>
+              <a:off x="4648520" y="2073503"/>
               <a:ext cx="0" cy="3649639"/>
             </a:xfrm>
             <a:custGeom>
@@ -4527,7 +4521,7 @@
           </p:nvSpPr>
           <p:spPr>
             <a:xfrm>
-              <a:off x="3519238" y="2073503"/>
+              <a:off x="3510041" y="2073503"/>
               <a:ext cx="0" cy="3649639"/>
             </a:xfrm>
             <a:custGeom>
@@ -4570,7 +4564,7 @@
           </p:nvSpPr>
           <p:spPr>
             <a:xfrm>
-              <a:off x="5667105" y="2073503"/>
+              <a:off x="5671562" y="2073503"/>
               <a:ext cx="0" cy="3649639"/>
             </a:xfrm>
             <a:custGeom>
@@ -4843,7 +4837,7 @@
           </p:nvSpPr>
           <p:spPr>
             <a:xfrm>
-              <a:off x="1701509" y="5785772"/>
+              <a:off x="1701133" y="5785772"/>
               <a:ext cx="161574" cy="80101"/>
             </a:xfrm>
             <a:prstGeom prst="rect">
@@ -4889,7 +4883,7 @@
           </p:nvSpPr>
           <p:spPr>
             <a:xfrm>
-              <a:off x="3528691" y="5785772"/>
+              <a:off x="3525106" y="5785772"/>
               <a:ext cx="161574" cy="80101"/>
             </a:xfrm>
             <a:prstGeom prst="rect">
@@ -4935,7 +4929,7 @@
           </p:nvSpPr>
           <p:spPr>
             <a:xfrm>
-              <a:off x="5405571" y="5785772"/>
+              <a:off x="5398776" y="5785772"/>
               <a:ext cx="62179" cy="80101"/>
             </a:xfrm>
             <a:prstGeom prst="rect">
@@ -4981,7 +4975,7 @@
           </p:nvSpPr>
           <p:spPr>
             <a:xfrm>
-              <a:off x="7201663" y="5785772"/>
+              <a:off x="7191659" y="5785772"/>
               <a:ext cx="124358" cy="80101"/>
             </a:xfrm>
             <a:prstGeom prst="rect">
@@ -5152,7 +5146,7 @@
                   <a:latin typeface="Helvetica"/>
                   <a:cs typeface="Helvetica"/>
                 </a:rPr>
-                <a:t>subHR per 10 % decline: 1.62 (0.80-3.28), p_Bonf = 1.000 (n = 6)  |  per IQR decline (Δ = 23.5 %): 3.12 (0.60-16.30)  |  IQR: [-21.0, 2.5] %</a:t>
+                <a:t>subHR per 10 % decline: 1.62 (0.80-3.28), p_Bonf = 1.000 (n = 6)  |  per IQR decline (Δ = 23.7 %): 3.15 (0.59-16.68)  |  IQR: [-21.1, 2.7] %</a:t>
               </a:r>
             </a:p>
           </p:txBody>
